--- a/AI_Security_Agent_Presentation.pptx
+++ b/AI_Security_Agent_Presentation.pptx
@@ -4,6 +4,9 @@
   <p:sldMasterIdLst>
     <p:sldMasterId id="2147483648" r:id="rId1"/>
   </p:sldMasterIdLst>
+  <p:notesMasterIdLst>
+    <p:notesMasterId r:id="rId8"/>
+  </p:notesMasterIdLst>
   <p:sldIdLst>
     <p:sldId id="256" r:id="rId2"/>
     <p:sldId id="257" r:id="rId3"/>
@@ -12,10 +15,7 @@
     <p:sldId id="260" r:id="rId6"/>
     <p:sldId id="261" r:id="rId7"/>
   </p:sldIdLst>
-  <p:notesMasterIdLst>
-    <p:notesMasterId r:id="rId8"/>
-  </p:notesMasterIdLst>
-  <p:sldSz cx="9144000" cy="5143500"/>
+  <p:sldSz cx="9144000" cy="5143500" type="screen16x9"/>
   <p:notesSz cx="5143500" cy="9144000"/>
   <p:defaultTextStyle>
     <a:lvl1pPr marL="0" algn="l" defTabSz="914400" rtl="0" eaLnBrk="1" latinLnBrk="0" hangingPunct="1">
@@ -109,6 +109,11 @@
       </a:defRPr>
     </a:lvl9pPr>
   </p:defaultTextStyle>
+  <p:extLst>
+    <p:ext uri="{EFAFB233-063F-42B5-8137-9DF3F51BA10A}">
+      <p15:sldGuideLst xmlns:p15="http://schemas.microsoft.com/office/powerpoint/2012/main"/>
+    </p:ext>
+  </p:extLst>
 </p:presentation>
 </file>
 
@@ -134,234 +139,10 @@
           <a:chExt cx="0" cy="0"/>
         </a:xfrm>
       </p:grpSpPr>
-      <p:sp>
-        <p:nvSpPr>
-          <p:cNvPr id="2" name="Header Placeholder 1"/>
-          <p:cNvSpPr>
-            <a:spLocks noGrp="1"/>
-          </p:cNvSpPr>
-          <p:nvPr>
-            <p:ph type="hdr" sz="quarter"/>
-          </p:nvPr>
-        </p:nvSpPr>
-        <p:spPr>
-          <a:xfrm>
-            <a:off x="0" y="0"/>
-            <a:ext cx="2971800" cy="458788"/>
-          </a:xfrm>
-          <a:prstGeom prst="rect">
-            <a:avLst/>
-          </a:prstGeom>
-        </p:spPr>
-        <p:txBody>
-          <a:bodyPr vert="horz" lIns="91440" tIns="45720" rIns="91440" bIns="45720" rtlCol="0"/>
-          <a:lstStyle>
-            <a:lvl1pPr algn="l">
-              <a:defRPr sz="1200"/>
-            </a:lvl1pPr>
-          </a:lstStyle>
-          <a:p>
-            <a:endParaRPr lang="en-US"/>
-          </a:p>
-        </p:txBody>
-      </p:sp>
-      <p:sp>
-        <p:nvSpPr>
-          <p:cNvPr id="3" name="Date Placeholder 2"/>
-          <p:cNvSpPr>
-            <a:spLocks noGrp="1"/>
-          </p:cNvSpPr>
-          <p:nvPr>
-            <p:ph type="dt" idx="1"/>
-          </p:nvPr>
-        </p:nvSpPr>
-        <p:spPr>
-          <a:xfrm>
-            <a:off x="3884613" y="0"/>
-            <a:ext cx="2971800" cy="458788"/>
-          </a:xfrm>
-          <a:prstGeom prst="rect">
-            <a:avLst/>
-          </a:prstGeom>
-        </p:spPr>
-        <p:txBody>
-          <a:bodyPr vert="horz" lIns="91440" tIns="45720" rIns="91440" bIns="45720" rtlCol="0"/>
-          <a:lstStyle>
-            <a:lvl1pPr algn="r">
-              <a:defRPr sz="1200"/>
-            </a:lvl1pPr>
-          </a:lstStyle>
-          <a:p>
-            <a:fld id="{5282F153-3F37-0F45-9E97-73ACFA13230C}" type="datetimeFigureOut">
-              <a:rPr lang="en-US"/>
-              <a:t>7/23/19</a:t>
-            </a:fld>
-            <a:endParaRPr lang="en-US"/>
-          </a:p>
-        </p:txBody>
-      </p:sp>
-      <p:sp>
-        <p:nvSpPr>
-          <p:cNvPr id="4" name="Slide Image Placeholder 3"/>
-          <p:cNvSpPr>
-            <a:spLocks noGrp="1" noRot="1" noChangeAspect="1"/>
-          </p:cNvSpPr>
-          <p:nvPr>
-            <p:ph type="sldImg" idx="2"/>
-          </p:nvPr>
-        </p:nvSpPr>
-        <p:spPr>
-          <a:xfrm>
-            <a:off x="685800" y="1143000"/>
-            <a:ext cx="5486400" cy="3086100"/>
-          </a:xfrm>
-          <a:prstGeom prst="rect">
-            <a:avLst/>
-          </a:prstGeom>
-          <a:noFill/>
-          <a:ln w="12700">
-            <a:solidFill>
-              <a:prstClr val="black"/>
-            </a:solidFill>
-          </a:ln>
-        </p:spPr>
-        <p:txBody>
-          <a:bodyPr vert="horz" lIns="91440" tIns="45720" rIns="91440" bIns="45720" rtlCol="0" anchor="ctr"/>
-          <a:lstStyle/>
-          <a:p>
-            <a:endParaRPr lang="en-US"/>
-          </a:p>
-        </p:txBody>
-      </p:sp>
-      <p:sp>
-        <p:nvSpPr>
-          <p:cNvPr id="5" name="Notes Placeholder 4"/>
-          <p:cNvSpPr>
-            <a:spLocks noGrp="1"/>
-          </p:cNvSpPr>
-          <p:nvPr>
-            <p:ph type="body" sz="quarter" idx="3"/>
-          </p:nvPr>
-        </p:nvSpPr>
-        <p:spPr>
-          <a:xfrm>
-            <a:off x="685800" y="4400550"/>
-            <a:ext cx="5486400" cy="3600450"/>
-          </a:xfrm>
-          <a:prstGeom prst="rect">
-            <a:avLst/>
-          </a:prstGeom>
-        </p:spPr>
-        <p:txBody>
-          <a:bodyPr vert="horz" lIns="91440" tIns="45720" rIns="91440" bIns="45720" rtlCol="0"/>
-          <a:lstStyle/>
-          <a:p>
-            <a:pPr lvl="0"/>
-            <a:r>
-              <a:rPr lang="en-US"/>
-              <a:t>Click to edit Master text styles</a:t>
-            </a:r>
-          </a:p>
-          <a:p>
-            <a:pPr lvl="1"/>
-            <a:r>
-              <a:rPr lang="en-US"/>
-              <a:t>Second level</a:t>
-            </a:r>
-          </a:p>
-          <a:p>
-            <a:pPr lvl="2"/>
-            <a:r>
-              <a:rPr lang="en-US"/>
-              <a:t>Third level</a:t>
-            </a:r>
-          </a:p>
-          <a:p>
-            <a:pPr lvl="3"/>
-            <a:r>
-              <a:rPr lang="en-US"/>
-              <a:t>Fourth level</a:t>
-            </a:r>
-          </a:p>
-          <a:p>
-            <a:pPr lvl="4"/>
-            <a:r>
-              <a:rPr lang="en-US"/>
-              <a:t>Fifth level</a:t>
-            </a:r>
-          </a:p>
-        </p:txBody>
-      </p:sp>
-      <p:sp>
-        <p:nvSpPr>
-          <p:cNvPr id="6" name="Footer Placeholder 5"/>
-          <p:cNvSpPr>
-            <a:spLocks noGrp="1"/>
-          </p:cNvSpPr>
-          <p:nvPr>
-            <p:ph type="ftr" sz="quarter" idx="4"/>
-          </p:nvPr>
-        </p:nvSpPr>
-        <p:spPr>
-          <a:xfrm>
-            <a:off x="0" y="8685213"/>
-            <a:ext cx="2971800" cy="458787"/>
-          </a:xfrm>
-          <a:prstGeom prst="rect">
-            <a:avLst/>
-          </a:prstGeom>
-        </p:spPr>
-        <p:txBody>
-          <a:bodyPr vert="horz" lIns="91440" tIns="45720" rIns="91440" bIns="45720" rtlCol="0" anchor="b"/>
-          <a:lstStyle>
-            <a:lvl1pPr algn="l">
-              <a:defRPr sz="1200"/>
-            </a:lvl1pPr>
-          </a:lstStyle>
-          <a:p>
-            <a:endParaRPr lang="en-US"/>
-          </a:p>
-        </p:txBody>
-      </p:sp>
-      <p:sp>
-        <p:nvSpPr>
-          <p:cNvPr id="7" name="Slide Number Placeholder 6"/>
-          <p:cNvSpPr>
-            <a:spLocks noGrp="1"/>
-          </p:cNvSpPr>
-          <p:nvPr>
-            <p:ph type="sldNum" sz="quarter" idx="5"/>
-          </p:nvPr>
-        </p:nvSpPr>
-        <p:spPr>
-          <a:xfrm>
-            <a:off x="3884613" y="8685213"/>
-            <a:ext cx="2971800" cy="458787"/>
-          </a:xfrm>
-          <a:prstGeom prst="rect">
-            <a:avLst/>
-          </a:prstGeom>
-        </p:spPr>
-        <p:txBody>
-          <a:bodyPr vert="horz" lIns="91440" tIns="45720" rIns="91440" bIns="45720" rtlCol="0" anchor="b"/>
-          <a:lstStyle>
-            <a:lvl1pPr algn="r">
-              <a:defRPr sz="1200"/>
-            </a:lvl1pPr>
-          </a:lstStyle>
-          <a:p>
-            <a:fld id="{CE5E9CC1-C706-0F49-92D6-E571CC5EEA8F}" type="slidenum">
-              <a:rPr lang="en-US"/>
-              <a:t>‹#›</a:t>
-            </a:fld>
-            <a:endParaRPr lang="en-US"/>
-          </a:p>
-        </p:txBody>
-      </p:sp>
     </p:spTree>
     <p:extLst>
       <p:ext uri="{BB962C8B-B14F-4D97-AF65-F5344CB8AC3E}">
-        <p14:creationId xmlns:p14="http://schemas.microsoft.com/office/powerpoint/2010/main" val="1024086991"/>
+        <p14:creationId xmlns:p14="http://schemas.microsoft.com/office/powerpoint/2010/main" val="3017903592"/>
       </p:ext>
     </p:extLst>
   </p:cSld>
@@ -505,10 +286,6 @@
           <a:bodyPr/>
           <a:lstStyle/>
           <a:p>
-            <a:r>
-              <a:rPr lang="en-US" dirty="0"/>
-              <a:t/>
-            </a:r>
             <a:endParaRPr lang="en-US" dirty="0"/>
           </a:p>
         </p:txBody>
@@ -593,10 +370,6 @@
           <a:bodyPr/>
           <a:lstStyle/>
           <a:p>
-            <a:r>
-              <a:rPr lang="en-US" dirty="0"/>
-              <a:t/>
-            </a:r>
             <a:endParaRPr lang="en-US" dirty="0"/>
           </a:p>
         </p:txBody>
@@ -681,10 +454,6 @@
           <a:bodyPr/>
           <a:lstStyle/>
           <a:p>
-            <a:r>
-              <a:rPr lang="en-US" dirty="0"/>
-              <a:t/>
-            </a:r>
             <a:endParaRPr lang="en-US" dirty="0"/>
           </a:p>
         </p:txBody>
@@ -769,10 +538,6 @@
           <a:bodyPr/>
           <a:lstStyle/>
           <a:p>
-            <a:r>
-              <a:rPr lang="en-US" dirty="0"/>
-              <a:t/>
-            </a:r>
             <a:endParaRPr lang="en-US" dirty="0"/>
           </a:p>
         </p:txBody>
@@ -857,10 +622,6 @@
           <a:bodyPr/>
           <a:lstStyle/>
           <a:p>
-            <a:r>
-              <a:rPr lang="en-US" dirty="0"/>
-              <a:t/>
-            </a:r>
             <a:endParaRPr lang="en-US" dirty="0"/>
           </a:p>
         </p:txBody>
@@ -945,10 +706,6 @@
           <a:bodyPr/>
           <a:lstStyle/>
           <a:p>
-            <a:r>
-              <a:rPr lang="en-US" dirty="0"/>
-              <a:t/>
-            </a:r>
             <a:endParaRPr lang="en-US" dirty="0"/>
           </a:p>
         </p:txBody>
@@ -1022,6 +779,11 @@
 <file path=ppt/slideMasters/slideMaster1.xml><?xml version="1.0" encoding="utf-8"?>
 <p:sldMaster xmlns:a="http://schemas.openxmlformats.org/drawingml/2006/main" xmlns:r="http://schemas.openxmlformats.org/officeDocument/2006/relationships" xmlns:p="http://schemas.openxmlformats.org/presentationml/2006/main">
   <p:cSld>
+    <p:bg>
+      <p:bgRef idx="1001">
+        <a:schemeClr val="bg1"/>
+      </p:bgRef>
+    </p:bg>
     <p:spTree>
       <p:nvGrpSpPr>
         <p:cNvPr id="1" name=""/>
@@ -1304,6 +1066,7 @@
         <a:solidFill>
           <a:srgbClr val="0A1628"/>
         </a:solidFill>
+        <a:effectLst/>
       </p:bgPr>
     </p:bg>
     <p:spTree>
@@ -1392,14 +1155,14 @@
       </p:sp>
       <p:pic>
         <p:nvPicPr>
-          <p:cNvPr id="5" name="Image 0" descr="preencoded.png">    </p:cNvPr>
+          <p:cNvPr id="5" name="Image 0" descr="preencoded.png"/>
           <p:cNvPicPr>
             <a:picLocks noChangeAspect="1"/>
           </p:cNvPicPr>
           <p:nvPr/>
         </p:nvPicPr>
         <p:blipFill>
-          <a:blip r:embed="rId1"/>
+          <a:blip r:embed="rId3"/>
           <a:stretch>
             <a:fillRect/>
           </a:stretch>
@@ -1435,7 +1198,7 @@
           <a:bodyPr wrap="square" lIns="0" tIns="0" rIns="0" bIns="0" rtlCol="0" anchor="ctr"/>
           <a:lstStyle/>
           <a:p>
-            <a:pPr indent="0" marL="0">
+            <a:pPr marL="0" indent="0">
               <a:buNone/>
             </a:pPr>
             <a:r>
@@ -1474,7 +1237,7 @@
           <a:bodyPr wrap="square" lIns="0" tIns="0" rIns="0" bIns="0" rtlCol="0" anchor="ctr"/>
           <a:lstStyle/>
           <a:p>
-            <a:pPr indent="0" marL="0">
+            <a:pPr marL="0" indent="0">
               <a:buNone/>
             </a:pPr>
             <a:r>
@@ -1538,7 +1301,7 @@
           <a:bodyPr wrap="square" lIns="0" tIns="0" rIns="0" bIns="0" rtlCol="0" anchor="ctr"/>
           <a:lstStyle/>
           <a:p>
-            <a:pPr indent="0" marL="0">
+            <a:pPr marL="0" indent="0">
               <a:buNone/>
             </a:pPr>
             <a:r>
@@ -1604,7 +1367,7 @@
           <a:bodyPr wrap="square" lIns="0" tIns="0" rIns="0" bIns="0" rtlCol="0" anchor="ctr"/>
           <a:lstStyle/>
           <a:p>
-            <a:pPr algn="ctr" indent="0" marL="0">
+            <a:pPr marL="0" indent="0" algn="ctr">
               <a:buNone/>
             </a:pPr>
             <a:r>
@@ -1630,7 +1393,7 @@
         </p:nvSpPr>
         <p:spPr>
           <a:xfrm>
-            <a:off x="2560320" y="3383280"/>
+            <a:off x="2889504" y="3383280"/>
             <a:ext cx="1920240" cy="347472"/>
           </a:xfrm>
           <a:prstGeom prst="roundRect">
@@ -1657,7 +1420,7 @@
         </p:nvSpPr>
         <p:spPr>
           <a:xfrm>
-            <a:off x="2560320" y="3383280"/>
+            <a:off x="2926080" y="3400262"/>
             <a:ext cx="1920240" cy="347472"/>
           </a:xfrm>
           <a:prstGeom prst="rect">
@@ -1670,7 +1433,7 @@
           <a:bodyPr wrap="square" lIns="0" tIns="0" rIns="0" bIns="0" rtlCol="0" anchor="ctr"/>
           <a:lstStyle/>
           <a:p>
-            <a:pPr algn="ctr" indent="0" marL="0">
+            <a:pPr marL="0" indent="0" algn="ctr">
               <a:buNone/>
             </a:pPr>
             <a:r>
@@ -1690,13 +1453,13 @@
       </p:sp>
       <p:sp>
         <p:nvSpPr>
-          <p:cNvPr id="14" name="Shape 11"/>
-          <p:cNvSpPr/>
-          <p:nvPr/>
-        </p:nvSpPr>
-        <p:spPr>
-          <a:xfrm>
-            <a:off x="4663440" y="3383280"/>
+          <p:cNvPr id="16" name="Shape 13"/>
+          <p:cNvSpPr/>
+          <p:nvPr/>
+        </p:nvSpPr>
+        <p:spPr>
+          <a:xfrm>
+            <a:off x="5212080" y="3383280"/>
             <a:ext cx="1920240" cy="347472"/>
           </a:xfrm>
           <a:prstGeom prst="roundRect">
@@ -1717,13 +1480,13 @@
       </p:sp>
       <p:sp>
         <p:nvSpPr>
-          <p:cNvPr id="15" name="Text 12"/>
-          <p:cNvSpPr/>
-          <p:nvPr/>
-        </p:nvSpPr>
-        <p:spPr>
-          <a:xfrm>
-            <a:off x="4663440" y="3383280"/>
+          <p:cNvPr id="17" name="Text 14"/>
+          <p:cNvSpPr/>
+          <p:nvPr/>
+        </p:nvSpPr>
+        <p:spPr>
+          <a:xfrm>
+            <a:off x="5212080" y="3383280"/>
             <a:ext cx="1920240" cy="347472"/>
           </a:xfrm>
           <a:prstGeom prst="rect">
@@ -1736,73 +1499,7 @@
           <a:bodyPr wrap="square" lIns="0" tIns="0" rIns="0" bIns="0" rtlCol="0" anchor="ctr"/>
           <a:lstStyle/>
           <a:p>
-            <a:pPr algn="ctr" indent="0" marL="0">
-              <a:buNone/>
-            </a:pPr>
-            <a:r>
-              <a:rPr lang="en-US" sz="900" dirty="0">
-                <a:solidFill>
-                  <a:srgbClr val="00D4FF"/>
-                </a:solidFill>
-                <a:latin typeface="Calibri" pitchFamily="34" charset="0"/>
-                <a:ea typeface="Calibri" pitchFamily="34" charset="-122"/>
-                <a:cs typeface="Calibri" pitchFamily="34" charset="-120"/>
-              </a:rPr>
-              <a:t>Python</a:t>
-            </a:r>
-            <a:endParaRPr lang="en-US" sz="900" dirty="0"/>
-          </a:p>
-        </p:txBody>
-      </p:sp>
-      <p:sp>
-        <p:nvSpPr>
-          <p:cNvPr id="16" name="Shape 13"/>
-          <p:cNvSpPr/>
-          <p:nvPr/>
-        </p:nvSpPr>
-        <p:spPr>
-          <a:xfrm>
-            <a:off x="6766560" y="3383280"/>
-            <a:ext cx="1920240" cy="347472"/>
-          </a:xfrm>
-          <a:prstGeom prst="roundRect">
-            <a:avLst>
-              <a:gd name="adj" fmla="val 21053"/>
-            </a:avLst>
-          </a:prstGeom>
-          <a:solidFill>
-            <a:srgbClr val="0E3460"/>
-          </a:solidFill>
-          <a:ln w="12700">
-            <a:solidFill>
-              <a:srgbClr val="0099BB"/>
-            </a:solidFill>
-            <a:prstDash val="solid"/>
-          </a:ln>
-        </p:spPr>
-      </p:sp>
-      <p:sp>
-        <p:nvSpPr>
-          <p:cNvPr id="17" name="Text 14"/>
-          <p:cNvSpPr/>
-          <p:nvPr/>
-        </p:nvSpPr>
-        <p:spPr>
-          <a:xfrm>
-            <a:off x="6766560" y="3383280"/>
-            <a:ext cx="1920240" cy="347472"/>
-          </a:xfrm>
-          <a:prstGeom prst="rect">
-            <a:avLst/>
-          </a:prstGeom>
-          <a:noFill/>
-          <a:ln/>
-        </p:spPr>
-        <p:txBody>
-          <a:bodyPr wrap="square" lIns="0" tIns="0" rIns="0" bIns="0" rtlCol="0" anchor="ctr"/>
-          <a:lstStyle/>
-          <a:p>
-            <a:pPr algn="ctr" indent="0" marL="0">
+            <a:pPr marL="0" indent="0" algn="ctr">
               <a:buNone/>
             </a:pPr>
             <a:r>
@@ -1841,7 +1538,7 @@
           <a:bodyPr wrap="square" lIns="0" tIns="0" rIns="0" bIns="0" rtlCol="0" anchor="ctr"/>
           <a:lstStyle/>
           <a:p>
-            <a:pPr indent="0" marL="0">
+            <a:pPr marL="0" indent="0">
               <a:buNone/>
             </a:pPr>
             <a:r>
@@ -1875,6 +1572,7 @@
         <a:solidFill>
           <a:srgbClr val="0A1628"/>
         </a:solidFill>
+        <a:effectLst/>
       </p:bgPr>
     </p:bg>
     <p:spTree>
@@ -1964,7 +1662,7 @@
           <a:bodyPr wrap="square" lIns="0" tIns="0" rIns="0" bIns="0" rtlCol="0" anchor="ctr"/>
           <a:lstStyle/>
           <a:p>
-            <a:pPr algn="ctr" indent="0" marL="0">
+            <a:pPr marL="0" indent="0" algn="ctr">
               <a:buNone/>
             </a:pPr>
             <a:r>
@@ -2003,7 +1701,7 @@
           <a:bodyPr wrap="square" lIns="0" tIns="0" rIns="0" bIns="0" rtlCol="0" anchor="ctr"/>
           <a:lstStyle/>
           <a:p>
-            <a:pPr indent="0" marL="0">
+            <a:pPr marL="0" indent="0">
               <a:buNone/>
             </a:pPr>
             <a:r>
@@ -2045,7 +1743,7 @@
             <a:prstDash val="solid"/>
           </a:ln>
           <a:effectLst>
-            <a:outerShdw sx="100000" sy="100000" kx="0" ky="0" algn="bl" rotWithShape="0" blurRad="101600" dist="38100" dir="8100000">
+            <a:outerShdw blurRad="101600" dist="38100" dir="8100000" algn="bl" rotWithShape="0">
               <a:srgbClr val="000000">
                 <a:alpha val="25000"/>
               </a:srgbClr>
@@ -2055,14 +1753,14 @@
       </p:sp>
       <p:pic>
         <p:nvPicPr>
-          <p:cNvPr id="7" name="Image 0" descr="preencoded.png">    </p:cNvPr>
+          <p:cNvPr id="7" name="Image 0" descr="preencoded.png"/>
           <p:cNvPicPr>
             <a:picLocks noChangeAspect="1"/>
           </p:cNvPicPr>
           <p:nvPr/>
         </p:nvPicPr>
         <p:blipFill>
-          <a:blip r:embed="rId1"/>
+          <a:blip r:embed="rId3"/>
           <a:stretch>
             <a:fillRect/>
           </a:stretch>
@@ -2098,7 +1796,7 @@
           <a:bodyPr wrap="square" lIns="0" tIns="0" rIns="0" bIns="0" rtlCol="0" anchor="ctr"/>
           <a:lstStyle/>
           <a:p>
-            <a:pPr indent="0" marL="0">
+            <a:pPr marL="0" indent="0">
               <a:buNone/>
             </a:pPr>
             <a:r>
@@ -2137,7 +1835,7 @@
           <a:bodyPr wrap="square" lIns="0" tIns="0" rIns="0" bIns="0" rtlCol="0" anchor="ctr"/>
           <a:lstStyle/>
           <a:p>
-            <a:pPr indent="0" marL="0">
+            <a:pPr marL="0" indent="0">
               <a:buNone/>
             </a:pPr>
             <a:r>
@@ -2179,7 +1877,7 @@
             <a:prstDash val="solid"/>
           </a:ln>
           <a:effectLst>
-            <a:outerShdw sx="100000" sy="100000" kx="0" ky="0" algn="bl" rotWithShape="0" blurRad="101600" dist="38100" dir="8100000">
+            <a:outerShdw blurRad="101600" dist="38100" dir="8100000" algn="bl" rotWithShape="0">
               <a:srgbClr val="000000">
                 <a:alpha val="25000"/>
               </a:srgbClr>
@@ -2189,14 +1887,14 @@
       </p:sp>
       <p:pic>
         <p:nvPicPr>
-          <p:cNvPr id="11" name="Image 1" descr="preencoded.png">    </p:cNvPr>
+          <p:cNvPr id="11" name="Image 1" descr="preencoded.png"/>
           <p:cNvPicPr>
             <a:picLocks noChangeAspect="1"/>
           </p:cNvPicPr>
           <p:nvPr/>
         </p:nvPicPr>
         <p:blipFill>
-          <a:blip r:embed="rId2"/>
+          <a:blip r:embed="rId4"/>
           <a:stretch>
             <a:fillRect/>
           </a:stretch>
@@ -2232,7 +1930,7 @@
           <a:bodyPr wrap="square" lIns="0" tIns="0" rIns="0" bIns="0" rtlCol="0" anchor="ctr"/>
           <a:lstStyle/>
           <a:p>
-            <a:pPr indent="0" marL="0">
+            <a:pPr marL="0" indent="0">
               <a:buNone/>
             </a:pPr>
             <a:r>
@@ -2271,7 +1969,7 @@
           <a:bodyPr wrap="square" lIns="0" tIns="0" rIns="0" bIns="0" rtlCol="0" anchor="ctr"/>
           <a:lstStyle/>
           <a:p>
-            <a:pPr indent="0" marL="0">
+            <a:pPr marL="0" indent="0">
               <a:buNone/>
             </a:pPr>
             <a:r>
@@ -2313,7 +2011,7 @@
             <a:prstDash val="solid"/>
           </a:ln>
           <a:effectLst>
-            <a:outerShdw sx="100000" sy="100000" kx="0" ky="0" algn="bl" rotWithShape="0" blurRad="101600" dist="38100" dir="8100000">
+            <a:outerShdw blurRad="101600" dist="38100" dir="8100000" algn="bl" rotWithShape="0">
               <a:srgbClr val="000000">
                 <a:alpha val="25000"/>
               </a:srgbClr>
@@ -2323,14 +2021,14 @@
       </p:sp>
       <p:pic>
         <p:nvPicPr>
-          <p:cNvPr id="15" name="Image 2" descr="preencoded.png">    </p:cNvPr>
+          <p:cNvPr id="15" name="Image 2" descr="preencoded.png"/>
           <p:cNvPicPr>
             <a:picLocks noChangeAspect="1"/>
           </p:cNvPicPr>
           <p:nvPr/>
         </p:nvPicPr>
         <p:blipFill>
-          <a:blip r:embed="rId3"/>
+          <a:blip r:embed="rId5"/>
           <a:stretch>
             <a:fillRect/>
           </a:stretch>
@@ -2366,7 +2064,7 @@
           <a:bodyPr wrap="square" lIns="0" tIns="0" rIns="0" bIns="0" rtlCol="0" anchor="ctr"/>
           <a:lstStyle/>
           <a:p>
-            <a:pPr indent="0" marL="0">
+            <a:pPr marL="0" indent="0">
               <a:buNone/>
             </a:pPr>
             <a:r>
@@ -2405,7 +2103,7 @@
           <a:bodyPr wrap="square" lIns="0" tIns="0" rIns="0" bIns="0" rtlCol="0" anchor="ctr"/>
           <a:lstStyle/>
           <a:p>
-            <a:pPr indent="0" marL="0">
+            <a:pPr marL="0" indent="0">
               <a:buNone/>
             </a:pPr>
             <a:r>
@@ -2447,7 +2145,7 @@
             <a:prstDash val="solid"/>
           </a:ln>
           <a:effectLst>
-            <a:outerShdw sx="100000" sy="100000" kx="0" ky="0" algn="bl" rotWithShape="0" blurRad="101600" dist="38100" dir="8100000">
+            <a:outerShdw blurRad="101600" dist="38100" dir="8100000" algn="bl" rotWithShape="0">
               <a:srgbClr val="000000">
                 <a:alpha val="25000"/>
               </a:srgbClr>
@@ -2457,14 +2155,14 @@
       </p:sp>
       <p:pic>
         <p:nvPicPr>
-          <p:cNvPr id="19" name="Image 3" descr="preencoded.png">    </p:cNvPr>
+          <p:cNvPr id="19" name="Image 3" descr="preencoded.png"/>
           <p:cNvPicPr>
             <a:picLocks noChangeAspect="1"/>
           </p:cNvPicPr>
           <p:nvPr/>
         </p:nvPicPr>
         <p:blipFill>
-          <a:blip r:embed="rId4"/>
+          <a:blip r:embed="rId6"/>
           <a:stretch>
             <a:fillRect/>
           </a:stretch>
@@ -2500,7 +2198,7 @@
           <a:bodyPr wrap="square" lIns="0" tIns="0" rIns="0" bIns="0" rtlCol="0" anchor="ctr"/>
           <a:lstStyle/>
           <a:p>
-            <a:pPr indent="0" marL="0">
+            <a:pPr marL="0" indent="0">
               <a:buNone/>
             </a:pPr>
             <a:r>
@@ -2539,7 +2237,7 @@
           <a:bodyPr wrap="square" lIns="0" tIns="0" rIns="0" bIns="0" rtlCol="0" anchor="ctr"/>
           <a:lstStyle/>
           <a:p>
-            <a:pPr indent="0" marL="0">
+            <a:pPr marL="0" indent="0">
               <a:buNone/>
             </a:pPr>
             <a:r>
@@ -2573,6 +2271,7 @@
         <a:solidFill>
           <a:srgbClr val="0A1628"/>
         </a:solidFill>
+        <a:effectLst/>
       </p:bgPr>
     </p:bg>
     <p:spTree>
@@ -2662,7 +2361,7 @@
           <a:bodyPr wrap="square" lIns="0" tIns="0" rIns="0" bIns="0" rtlCol="0" anchor="ctr"/>
           <a:lstStyle/>
           <a:p>
-            <a:pPr algn="ctr" indent="0" marL="0">
+            <a:pPr marL="0" indent="0" algn="ctr">
               <a:buNone/>
             </a:pPr>
             <a:r>
@@ -2701,7 +2400,7 @@
           <a:bodyPr wrap="square" lIns="0" tIns="0" rIns="0" bIns="0" rtlCol="0" anchor="ctr"/>
           <a:lstStyle/>
           <a:p>
-            <a:pPr indent="0" marL="0">
+            <a:pPr marL="0" indent="0">
               <a:buNone/>
             </a:pPr>
             <a:r>
@@ -2743,7 +2442,7 @@
             <a:prstDash val="solid"/>
           </a:ln>
           <a:effectLst>
-            <a:outerShdw sx="100000" sy="100000" kx="0" ky="0" algn="bl" rotWithShape="0" blurRad="101600" dist="38100" dir="8100000">
+            <a:outerShdw blurRad="101600" dist="38100" dir="8100000" algn="bl" rotWithShape="0">
               <a:srgbClr val="000000">
                 <a:alpha val="25000"/>
               </a:srgbClr>
@@ -2778,14 +2477,14 @@
       </p:sp>
       <p:pic>
         <p:nvPicPr>
-          <p:cNvPr id="8" name="Image 0" descr="preencoded.png">    </p:cNvPr>
+          <p:cNvPr id="8" name="Image 0" descr="preencoded.png"/>
           <p:cNvPicPr>
             <a:picLocks noChangeAspect="1"/>
           </p:cNvPicPr>
           <p:nvPr/>
         </p:nvPicPr>
         <p:blipFill>
-          <a:blip r:embed="rId1"/>
+          <a:blip r:embed="rId3"/>
           <a:stretch>
             <a:fillRect/>
           </a:stretch>
@@ -2821,7 +2520,7 @@
           <a:bodyPr wrap="square" lIns="0" tIns="0" rIns="0" bIns="0" rtlCol="0" anchor="ctr"/>
           <a:lstStyle/>
           <a:p>
-            <a:pPr algn="ctr" indent="0" marL="0">
+            <a:pPr marL="0" indent="0" algn="ctr">
               <a:buNone/>
             </a:pPr>
             <a:r>
@@ -2860,7 +2559,7 @@
           <a:bodyPr wrap="square" lIns="0" tIns="0" rIns="0" bIns="0" rtlCol="0" anchor="ctr"/>
           <a:lstStyle/>
           <a:p>
-            <a:pPr algn="ctr" indent="0" marL="0">
+            <a:pPr marL="0" indent="0" algn="ctr">
               <a:buNone/>
             </a:pPr>
             <a:r>
@@ -2877,7 +2576,7 @@
             <a:endParaRPr lang="en-US" sz="950" dirty="0"/>
           </a:p>
           <a:p>
-            <a:pPr algn="ctr" indent="0" marL="0">
+            <a:pPr marL="0" indent="0" algn="ctr">
               <a:buNone/>
             </a:pPr>
             <a:r>
@@ -2939,7 +2638,7 @@
           <a:bodyPr wrap="square" lIns="0" tIns="0" rIns="0" bIns="0" rtlCol="0" anchor="ctr"/>
           <a:lstStyle/>
           <a:p>
-            <a:pPr algn="ctr" indent="0" marL="0">
+            <a:pPr marL="0" indent="0" algn="ctr">
               <a:buNone/>
             </a:pPr>
             <a:r>
@@ -2981,7 +2680,7 @@
             <a:prstDash val="solid"/>
           </a:ln>
           <a:effectLst>
-            <a:outerShdw sx="100000" sy="100000" kx="0" ky="0" algn="bl" rotWithShape="0" blurRad="101600" dist="38100" dir="8100000">
+            <a:outerShdw blurRad="101600" dist="38100" dir="8100000" algn="bl" rotWithShape="0">
               <a:srgbClr val="000000">
                 <a:alpha val="25000"/>
               </a:srgbClr>
@@ -3016,14 +2715,14 @@
       </p:sp>
       <p:pic>
         <p:nvPicPr>
-          <p:cNvPr id="15" name="Image 1" descr="preencoded.png">    </p:cNvPr>
+          <p:cNvPr id="15" name="Image 1" descr="preencoded.png"/>
           <p:cNvPicPr>
             <a:picLocks noChangeAspect="1"/>
           </p:cNvPicPr>
           <p:nvPr/>
         </p:nvPicPr>
         <p:blipFill>
-          <a:blip r:embed="rId2"/>
+          <a:blip r:embed="rId4"/>
           <a:stretch>
             <a:fillRect/>
           </a:stretch>
@@ -3059,7 +2758,7 @@
           <a:bodyPr wrap="square" lIns="0" tIns="0" rIns="0" bIns="0" rtlCol="0" anchor="ctr"/>
           <a:lstStyle/>
           <a:p>
-            <a:pPr algn="ctr" indent="0" marL="0">
+            <a:pPr marL="0" indent="0" algn="ctr">
               <a:buNone/>
             </a:pPr>
             <a:r>
@@ -3098,7 +2797,7 @@
           <a:bodyPr wrap="square" lIns="0" tIns="0" rIns="0" bIns="0" rtlCol="0" anchor="ctr"/>
           <a:lstStyle/>
           <a:p>
-            <a:pPr algn="ctr" indent="0" marL="0">
+            <a:pPr marL="0" indent="0" algn="ctr">
               <a:buNone/>
             </a:pPr>
             <a:r>
@@ -3115,7 +2814,7 @@
             <a:endParaRPr lang="en-US" sz="950" dirty="0"/>
           </a:p>
           <a:p>
-            <a:pPr algn="ctr" indent="0" marL="0">
+            <a:pPr marL="0" indent="0" algn="ctr">
               <a:buNone/>
             </a:pPr>
             <a:r>
@@ -3177,7 +2876,7 @@
           <a:bodyPr wrap="square" lIns="0" tIns="0" rIns="0" bIns="0" rtlCol="0" anchor="ctr"/>
           <a:lstStyle/>
           <a:p>
-            <a:pPr algn="ctr" indent="0" marL="0">
+            <a:pPr marL="0" indent="0" algn="ctr">
               <a:buNone/>
             </a:pPr>
             <a:r>
@@ -3219,7 +2918,7 @@
             <a:prstDash val="solid"/>
           </a:ln>
           <a:effectLst>
-            <a:outerShdw sx="100000" sy="100000" kx="0" ky="0" algn="bl" rotWithShape="0" blurRad="101600" dist="38100" dir="8100000">
+            <a:outerShdw blurRad="101600" dist="38100" dir="8100000" algn="bl" rotWithShape="0">
               <a:srgbClr val="000000">
                 <a:alpha val="25000"/>
               </a:srgbClr>
@@ -3254,14 +2953,14 @@
       </p:sp>
       <p:pic>
         <p:nvPicPr>
-          <p:cNvPr id="22" name="Image 2" descr="preencoded.png">    </p:cNvPr>
+          <p:cNvPr id="22" name="Image 2" descr="preencoded.png"/>
           <p:cNvPicPr>
             <a:picLocks noChangeAspect="1"/>
           </p:cNvPicPr>
           <p:nvPr/>
         </p:nvPicPr>
         <p:blipFill>
-          <a:blip r:embed="rId3"/>
+          <a:blip r:embed="rId5"/>
           <a:stretch>
             <a:fillRect/>
           </a:stretch>
@@ -3297,7 +2996,7 @@
           <a:bodyPr wrap="square" lIns="0" tIns="0" rIns="0" bIns="0" rtlCol="0" anchor="ctr"/>
           <a:lstStyle/>
           <a:p>
-            <a:pPr algn="ctr" indent="0" marL="0">
+            <a:pPr marL="0" indent="0" algn="ctr">
               <a:buNone/>
             </a:pPr>
             <a:r>
@@ -3336,7 +3035,7 @@
           <a:bodyPr wrap="square" lIns="0" tIns="0" rIns="0" bIns="0" rtlCol="0" anchor="ctr"/>
           <a:lstStyle/>
           <a:p>
-            <a:pPr algn="ctr" indent="0" marL="0">
+            <a:pPr marL="0" indent="0" algn="ctr">
               <a:buNone/>
             </a:pPr>
             <a:r>
@@ -3353,7 +3052,7 @@
             <a:endParaRPr lang="en-US" sz="950" dirty="0"/>
           </a:p>
           <a:p>
-            <a:pPr algn="ctr" indent="0" marL="0">
+            <a:pPr marL="0" indent="0" algn="ctr">
               <a:buNone/>
             </a:pPr>
             <a:r>
@@ -3415,7 +3114,7 @@
           <a:bodyPr wrap="square" lIns="0" tIns="0" rIns="0" bIns="0" rtlCol="0" anchor="ctr"/>
           <a:lstStyle/>
           <a:p>
-            <a:pPr algn="ctr" indent="0" marL="0">
+            <a:pPr marL="0" indent="0" algn="ctr">
               <a:buNone/>
             </a:pPr>
             <a:r>
@@ -3457,7 +3156,7 @@
             <a:prstDash val="solid"/>
           </a:ln>
           <a:effectLst>
-            <a:outerShdw sx="100000" sy="100000" kx="0" ky="0" algn="bl" rotWithShape="0" blurRad="101600" dist="38100" dir="8100000">
+            <a:outerShdw blurRad="101600" dist="38100" dir="8100000" algn="bl" rotWithShape="0">
               <a:srgbClr val="000000">
                 <a:alpha val="25000"/>
               </a:srgbClr>
@@ -3492,14 +3191,14 @@
       </p:sp>
       <p:pic>
         <p:nvPicPr>
-          <p:cNvPr id="29" name="Image 3" descr="preencoded.png">    </p:cNvPr>
+          <p:cNvPr id="29" name="Image 3" descr="preencoded.png"/>
           <p:cNvPicPr>
             <a:picLocks noChangeAspect="1"/>
           </p:cNvPicPr>
           <p:nvPr/>
         </p:nvPicPr>
         <p:blipFill>
-          <a:blip r:embed="rId4"/>
+          <a:blip r:embed="rId6"/>
           <a:stretch>
             <a:fillRect/>
           </a:stretch>
@@ -3535,7 +3234,7 @@
           <a:bodyPr wrap="square" lIns="0" tIns="0" rIns="0" bIns="0" rtlCol="0" anchor="ctr"/>
           <a:lstStyle/>
           <a:p>
-            <a:pPr algn="ctr" indent="0" marL="0">
+            <a:pPr marL="0" indent="0" algn="ctr">
               <a:buNone/>
             </a:pPr>
             <a:r>
@@ -3574,7 +3273,7 @@
           <a:bodyPr wrap="square" lIns="0" tIns="0" rIns="0" bIns="0" rtlCol="0" anchor="ctr"/>
           <a:lstStyle/>
           <a:p>
-            <a:pPr algn="ctr" indent="0" marL="0">
+            <a:pPr marL="0" indent="0" algn="ctr">
               <a:buNone/>
             </a:pPr>
             <a:r>
@@ -3591,7 +3290,7 @@
             <a:endParaRPr lang="en-US" sz="950" dirty="0"/>
           </a:p>
           <a:p>
-            <a:pPr algn="ctr" indent="0" marL="0">
+            <a:pPr marL="0" indent="0" algn="ctr">
               <a:buNone/>
             </a:pPr>
             <a:r>
@@ -3653,7 +3352,7 @@
           <a:bodyPr wrap="square" lIns="0" tIns="0" rIns="0" bIns="0" rtlCol="0" anchor="ctr"/>
           <a:lstStyle/>
           <a:p>
-            <a:pPr algn="ctr" indent="0" marL="0">
+            <a:pPr marL="0" indent="0" algn="ctr">
               <a:buNone/>
             </a:pPr>
             <a:r>
@@ -3695,7 +3394,7 @@
             <a:prstDash val="solid"/>
           </a:ln>
           <a:effectLst>
-            <a:outerShdw sx="100000" sy="100000" kx="0" ky="0" algn="bl" rotWithShape="0" blurRad="101600" dist="38100" dir="8100000">
+            <a:outerShdw blurRad="101600" dist="38100" dir="8100000" algn="bl" rotWithShape="0">
               <a:srgbClr val="000000">
                 <a:alpha val="25000"/>
               </a:srgbClr>
@@ -3730,14 +3429,14 @@
       </p:sp>
       <p:pic>
         <p:nvPicPr>
-          <p:cNvPr id="36" name="Image 4" descr="preencoded.png">    </p:cNvPr>
+          <p:cNvPr id="36" name="Image 4" descr="preencoded.png"/>
           <p:cNvPicPr>
             <a:picLocks noChangeAspect="1"/>
           </p:cNvPicPr>
           <p:nvPr/>
         </p:nvPicPr>
         <p:blipFill>
-          <a:blip r:embed="rId5"/>
+          <a:blip r:embed="rId7"/>
           <a:stretch>
             <a:fillRect/>
           </a:stretch>
@@ -3773,7 +3472,7 @@
           <a:bodyPr wrap="square" lIns="0" tIns="0" rIns="0" bIns="0" rtlCol="0" anchor="ctr"/>
           <a:lstStyle/>
           <a:p>
-            <a:pPr algn="ctr" indent="0" marL="0">
+            <a:pPr marL="0" indent="0" algn="ctr">
               <a:buNone/>
             </a:pPr>
             <a:r>
@@ -3812,7 +3511,7 @@
           <a:bodyPr wrap="square" lIns="0" tIns="0" rIns="0" bIns="0" rtlCol="0" anchor="ctr"/>
           <a:lstStyle/>
           <a:p>
-            <a:pPr algn="ctr" indent="0" marL="0">
+            <a:pPr marL="0" indent="0" algn="ctr">
               <a:buNone/>
             </a:pPr>
             <a:r>
@@ -3829,7 +3528,7 @@
             <a:endParaRPr lang="en-US" sz="950" dirty="0"/>
           </a:p>
           <a:p>
-            <a:pPr algn="ctr" indent="0" marL="0">
+            <a:pPr marL="0" indent="0" algn="ctr">
               <a:buNone/>
             </a:pPr>
             <a:r>
@@ -3893,7 +3592,7 @@
           <a:bodyPr wrap="square" lIns="0" tIns="0" rIns="0" bIns="0" rtlCol="0" anchor="ctr"/>
           <a:lstStyle/>
           <a:p>
-            <a:pPr indent="0" marL="0">
+            <a:pPr marL="0" indent="0">
               <a:buNone/>
             </a:pPr>
             <a:r>
@@ -3932,7 +3631,7 @@
           <a:bodyPr wrap="square" lIns="0" tIns="0" rIns="0" bIns="0" rtlCol="0" anchor="ctr"/>
           <a:lstStyle/>
           <a:p>
-            <a:pPr indent="0" marL="0">
+            <a:pPr marL="0" indent="0">
               <a:buNone/>
             </a:pPr>
             <a:r>
@@ -3946,9 +3645,6 @@
               </a:rPr>
               <a:t>Prior: </a:t>
             </a:r>
-            <a:pPr indent="0" marL="0">
-              <a:buNone/>
-            </a:pPr>
             <a:r>
               <a:rPr lang="en-US" sz="1050" dirty="0">
                 <a:solidFill>
@@ -3961,9 +3657,6 @@
               <a:t>P(HIGH_RISK | ip_risk, off_hours)  encoded as expert CPT
 </a:t>
             </a:r>
-            <a:pPr indent="0" marL="0">
-              <a:buNone/>
-            </a:pPr>
             <a:r>
               <a:rPr lang="en-US" sz="1050" b="1" dirty="0">
                 <a:solidFill>
@@ -3975,9 +3668,6 @@
               </a:rPr>
               <a:t>Likelihood: </a:t>
             </a:r>
-            <a:pPr indent="0" marL="0">
-              <a:buNone/>
-            </a:pPr>
             <a:r>
               <a:rPr lang="en-US" sz="1050" dirty="0">
                 <a:solidFill>
@@ -3990,9 +3680,6 @@
               <a:t>P(ML fires | HIGH_RISK)=0.92,  P(ML fires | LOW_RISK)=0.08
 </a:t>
             </a:r>
-            <a:pPr indent="0" marL="0">
-              <a:buNone/>
-            </a:pPr>
             <a:r>
               <a:rPr lang="en-US" sz="1050" b="1" dirty="0">
                 <a:solidFill>
@@ -4004,9 +3691,6 @@
               </a:rPr>
               <a:t>Posterior: </a:t>
             </a:r>
-            <a:pPr indent="0" marL="0">
-              <a:buNone/>
-            </a:pPr>
             <a:r>
               <a:rPr lang="en-US" sz="1050" dirty="0">
                 <a:solidFill>
@@ -4038,6 +3722,7 @@
         <a:solidFill>
           <a:srgbClr val="0A1628"/>
         </a:solidFill>
+        <a:effectLst/>
       </p:bgPr>
     </p:bg>
     <p:spTree>
@@ -4127,7 +3812,7 @@
           <a:bodyPr wrap="square" lIns="0" tIns="0" rIns="0" bIns="0" rtlCol="0" anchor="ctr"/>
           <a:lstStyle/>
           <a:p>
-            <a:pPr algn="ctr" indent="0" marL="0">
+            <a:pPr marL="0" indent="0" algn="ctr">
               <a:buNone/>
             </a:pPr>
             <a:r>
@@ -4166,7 +3851,7 @@
           <a:bodyPr wrap="square" lIns="0" tIns="0" rIns="0" bIns="0" rtlCol="0" anchor="ctr"/>
           <a:lstStyle/>
           <a:p>
-            <a:pPr indent="0" marL="0">
+            <a:pPr marL="0" indent="0">
               <a:buNone/>
             </a:pPr>
             <a:r>
@@ -4205,11 +3890,11 @@
           <a:bodyPr wrap="square" lIns="0" tIns="0" rIns="0" bIns="0" rtlCol="0" anchor="ctr"/>
           <a:lstStyle/>
           <a:p>
-            <a:pPr indent="0" marL="0">
-              <a:buNone/>
-            </a:pPr>
-            <a:r>
-              <a:rPr lang="en-US" sz="1100" b="1" spc="200" kern="0" dirty="0">
+            <a:pPr marL="0" indent="0">
+              <a:buNone/>
+            </a:pPr>
+            <a:r>
+              <a:rPr lang="en-US" sz="1100" b="1" kern="0" spc="200" dirty="0">
                 <a:solidFill>
                   <a:srgbClr val="6B8CAE"/>
                 </a:solidFill>
@@ -4275,311 +3960,7 @@
       </p:sp>
       <p:pic>
         <p:nvPicPr>
-          <p:cNvPr id="9" name="Image 0" descr="preencoded.png">    </p:cNvPr>
-          <p:cNvPicPr>
-            <a:picLocks noChangeAspect="1"/>
-          </p:cNvPicPr>
-          <p:nvPr/>
-        </p:nvPicPr>
-        <p:blipFill>
-          <a:blip r:embed="rId1"/>
-          <a:stretch>
-            <a:fillRect/>
-          </a:stretch>
-        </p:blipFill>
-        <p:spPr>
-          <a:xfrm>
-            <a:off x="475488" y="1417320"/>
-            <a:ext cx="411480" cy="411480"/>
-          </a:xfrm>
-          <a:prstGeom prst="rect">
-            <a:avLst/>
-          </a:prstGeom>
-        </p:spPr>
-      </p:pic>
-      <p:sp>
-        <p:nvSpPr>
-          <p:cNvPr id="10" name="Text 7"/>
-          <p:cNvSpPr/>
-          <p:nvPr/>
-        </p:nvSpPr>
-        <p:spPr>
-          <a:xfrm>
-            <a:off x="1005840" y="1335024"/>
-            <a:ext cx="2011680" cy="320040"/>
-          </a:xfrm>
-          <a:prstGeom prst="rect">
-            <a:avLst/>
-          </a:prstGeom>
-          <a:noFill/>
-          <a:ln/>
-        </p:spPr>
-        <p:txBody>
-          <a:bodyPr wrap="square" lIns="0" tIns="0" rIns="0" bIns="0" rtlCol="0" anchor="ctr"/>
-          <a:lstStyle/>
-          <a:p>
-            <a:pPr indent="0" marL="0">
-              <a:buNone/>
-            </a:pPr>
-            <a:r>
-              <a:rPr lang="en-US" sz="1200" b="1" dirty="0">
-                <a:solidFill>
-                  <a:srgbClr val="FF3D57"/>
-                </a:solidFill>
-                <a:latin typeface="Calibri" pitchFamily="34" charset="0"/>
-                <a:ea typeface="Calibri" pitchFamily="34" charset="-122"/>
-                <a:cs typeface="Calibri" pitchFamily="34" charset="-120"/>
-              </a:rPr>
-              <a:t>BLOCK_IP</a:t>
-            </a:r>
-            <a:endParaRPr lang="en-US" sz="1200" dirty="0"/>
-          </a:p>
-        </p:txBody>
-      </p:sp>
-      <p:sp>
-        <p:nvSpPr>
-          <p:cNvPr id="11" name="Text 8"/>
-          <p:cNvSpPr/>
-          <p:nvPr/>
-        </p:nvSpPr>
-        <p:spPr>
-          <a:xfrm>
-            <a:off x="1005840" y="1645920"/>
-            <a:ext cx="3200400" cy="274320"/>
-          </a:xfrm>
-          <a:prstGeom prst="rect">
-            <a:avLst/>
-          </a:prstGeom>
-          <a:noFill/>
-          <a:ln/>
-        </p:spPr>
-        <p:txBody>
-          <a:bodyPr wrap="square" lIns="0" tIns="0" rIns="0" bIns="0" rtlCol="0" anchor="ctr"/>
-          <a:lstStyle/>
-          <a:p>
-            <a:pPr indent="0" marL="0">
-              <a:buNone/>
-            </a:pPr>
-            <a:r>
-              <a:rPr lang="en-US" sz="950" dirty="0">
-                <a:solidFill>
-                  <a:srgbClr val="6B8CAE"/>
-                </a:solidFill>
-                <a:latin typeface="Calibri" pitchFamily="34" charset="0"/>
-                <a:ea typeface="Calibri" pitchFamily="34" charset="-122"/>
-                <a:cs typeface="Calibri" pitchFamily="34" charset="-120"/>
-              </a:rPr>
-              <a:t>Posterior ≥ 0.85  ·  CRITICAL</a:t>
-            </a:r>
-            <a:endParaRPr lang="en-US" sz="950" dirty="0"/>
-          </a:p>
-        </p:txBody>
-      </p:sp>
-      <p:sp>
-        <p:nvSpPr>
-          <p:cNvPr id="12" name="Shape 9"/>
-          <p:cNvSpPr/>
-          <p:nvPr/>
-        </p:nvSpPr>
-        <p:spPr>
-          <a:xfrm>
-            <a:off x="320040" y="2130552"/>
-            <a:ext cx="4114800" cy="713232"/>
-          </a:xfrm>
-          <a:prstGeom prst="rect">
-            <a:avLst/>
-          </a:prstGeom>
-          <a:solidFill>
-            <a:srgbClr val="112240"/>
-          </a:solidFill>
-          <a:ln w="12700">
-            <a:solidFill>
-              <a:srgbClr val="FF6B35"/>
-            </a:solidFill>
-            <a:prstDash val="solid"/>
-          </a:ln>
-        </p:spPr>
-      </p:sp>
-      <p:sp>
-        <p:nvSpPr>
-          <p:cNvPr id="13" name="Shape 10"/>
-          <p:cNvSpPr/>
-          <p:nvPr/>
-        </p:nvSpPr>
-        <p:spPr>
-          <a:xfrm>
-            <a:off x="320040" y="2130552"/>
-            <a:ext cx="64008" cy="713232"/>
-          </a:xfrm>
-          <a:prstGeom prst="rect">
-            <a:avLst/>
-          </a:prstGeom>
-          <a:solidFill>
-            <a:srgbClr val="FF6B35"/>
-          </a:solidFill>
-          <a:ln w="12700">
-            <a:solidFill>
-              <a:srgbClr val="FF6B35"/>
-            </a:solidFill>
-            <a:prstDash val="solid"/>
-          </a:ln>
-        </p:spPr>
-      </p:sp>
-      <p:pic>
-        <p:nvPicPr>
-          <p:cNvPr id="14" name="Image 1" descr="preencoded.png">    </p:cNvPr>
-          <p:cNvPicPr>
-            <a:picLocks noChangeAspect="1"/>
-          </p:cNvPicPr>
-          <p:nvPr/>
-        </p:nvPicPr>
-        <p:blipFill>
-          <a:blip r:embed="rId2"/>
-          <a:stretch>
-            <a:fillRect/>
-          </a:stretch>
-        </p:blipFill>
-        <p:spPr>
-          <a:xfrm>
-            <a:off x="475488" y="2267712"/>
-            <a:ext cx="411480" cy="411480"/>
-          </a:xfrm>
-          <a:prstGeom prst="rect">
-            <a:avLst/>
-          </a:prstGeom>
-        </p:spPr>
-      </p:pic>
-      <p:sp>
-        <p:nvSpPr>
-          <p:cNvPr id="15" name="Text 11"/>
-          <p:cNvSpPr/>
-          <p:nvPr/>
-        </p:nvSpPr>
-        <p:spPr>
-          <a:xfrm>
-            <a:off x="1005840" y="2185416"/>
-            <a:ext cx="2011680" cy="320040"/>
-          </a:xfrm>
-          <a:prstGeom prst="rect">
-            <a:avLst/>
-          </a:prstGeom>
-          <a:noFill/>
-          <a:ln/>
-        </p:spPr>
-        <p:txBody>
-          <a:bodyPr wrap="square" lIns="0" tIns="0" rIns="0" bIns="0" rtlCol="0" anchor="ctr"/>
-          <a:lstStyle/>
-          <a:p>
-            <a:pPr indent="0" marL="0">
-              <a:buNone/>
-            </a:pPr>
-            <a:r>
-              <a:rPr lang="en-US" sz="1200" b="1" dirty="0">
-                <a:solidFill>
-                  <a:srgbClr val="FF6B35"/>
-                </a:solidFill>
-                <a:latin typeface="Calibri" pitchFamily="34" charset="0"/>
-                <a:ea typeface="Calibri" pitchFamily="34" charset="-122"/>
-                <a:cs typeface="Calibri" pitchFamily="34" charset="-120"/>
-              </a:rPr>
-              <a:t>ALERT_ADMIN</a:t>
-            </a:r>
-            <a:endParaRPr lang="en-US" sz="1200" dirty="0"/>
-          </a:p>
-        </p:txBody>
-      </p:sp>
-      <p:sp>
-        <p:nvSpPr>
-          <p:cNvPr id="16" name="Text 12"/>
-          <p:cNvSpPr/>
-          <p:nvPr/>
-        </p:nvSpPr>
-        <p:spPr>
-          <a:xfrm>
-            <a:off x="1005840" y="2496312"/>
-            <a:ext cx="3200400" cy="274320"/>
-          </a:xfrm>
-          <a:prstGeom prst="rect">
-            <a:avLst/>
-          </a:prstGeom>
-          <a:noFill/>
-          <a:ln/>
-        </p:spPr>
-        <p:txBody>
-          <a:bodyPr wrap="square" lIns="0" tIns="0" rIns="0" bIns="0" rtlCol="0" anchor="ctr"/>
-          <a:lstStyle/>
-          <a:p>
-            <a:pPr indent="0" marL="0">
-              <a:buNone/>
-            </a:pPr>
-            <a:r>
-              <a:rPr lang="en-US" sz="950" dirty="0">
-                <a:solidFill>
-                  <a:srgbClr val="6B8CAE"/>
-                </a:solidFill>
-                <a:latin typeface="Calibri" pitchFamily="34" charset="0"/>
-                <a:ea typeface="Calibri" pitchFamily="34" charset="-122"/>
-                <a:cs typeface="Calibri" pitchFamily="34" charset="-120"/>
-              </a:rPr>
-              <a:t>Posterior 0.65–0.84  ·  HIGH</a:t>
-            </a:r>
-            <a:endParaRPr lang="en-US" sz="950" dirty="0"/>
-          </a:p>
-        </p:txBody>
-      </p:sp>
-      <p:sp>
-        <p:nvSpPr>
-          <p:cNvPr id="17" name="Shape 13"/>
-          <p:cNvSpPr/>
-          <p:nvPr/>
-        </p:nvSpPr>
-        <p:spPr>
-          <a:xfrm>
-            <a:off x="320040" y="2980944"/>
-            <a:ext cx="4114800" cy="713232"/>
-          </a:xfrm>
-          <a:prstGeom prst="rect">
-            <a:avLst/>
-          </a:prstGeom>
-          <a:solidFill>
-            <a:srgbClr val="112240"/>
-          </a:solidFill>
-          <a:ln w="12700">
-            <a:solidFill>
-              <a:srgbClr val="FFD166"/>
-            </a:solidFill>
-            <a:prstDash val="solid"/>
-          </a:ln>
-        </p:spPr>
-      </p:sp>
-      <p:sp>
-        <p:nvSpPr>
-          <p:cNvPr id="18" name="Shape 14"/>
-          <p:cNvSpPr/>
-          <p:nvPr/>
-        </p:nvSpPr>
-        <p:spPr>
-          <a:xfrm>
-            <a:off x="320040" y="2980944"/>
-            <a:ext cx="64008" cy="713232"/>
-          </a:xfrm>
-          <a:prstGeom prst="rect">
-            <a:avLst/>
-          </a:prstGeom>
-          <a:solidFill>
-            <a:srgbClr val="FFD166"/>
-          </a:solidFill>
-          <a:ln w="12700">
-            <a:solidFill>
-              <a:srgbClr val="FFD166"/>
-            </a:solidFill>
-            <a:prstDash val="solid"/>
-          </a:ln>
-        </p:spPr>
-      </p:sp>
-      <p:pic>
-        <p:nvPicPr>
-          <p:cNvPr id="19" name="Image 2" descr="preencoded.png">    </p:cNvPr>
+          <p:cNvPr id="9" name="Image 0" descr="preencoded.png"/>
           <p:cNvPicPr>
             <a:picLocks noChangeAspect="1"/>
           </p:cNvPicPr>
@@ -4593,7 +3974,7 @@
         </p:blipFill>
         <p:spPr>
           <a:xfrm>
-            <a:off x="475488" y="3118104"/>
+            <a:off x="475488" y="1417320"/>
             <a:ext cx="411480" cy="411480"/>
           </a:xfrm>
           <a:prstGeom prst="rect">
@@ -4603,13 +3984,13 @@
       </p:pic>
       <p:sp>
         <p:nvSpPr>
-          <p:cNvPr id="20" name="Text 15"/>
-          <p:cNvSpPr/>
-          <p:nvPr/>
-        </p:nvSpPr>
-        <p:spPr>
-          <a:xfrm>
-            <a:off x="1005840" y="3035808"/>
+          <p:cNvPr id="10" name="Text 7"/>
+          <p:cNvSpPr/>
+          <p:nvPr/>
+        </p:nvSpPr>
+        <p:spPr>
+          <a:xfrm>
+            <a:off x="1005840" y="1335024"/>
             <a:ext cx="2011680" cy="320040"/>
           </a:xfrm>
           <a:prstGeom prst="rect">
@@ -4622,19 +4003,19 @@
           <a:bodyPr wrap="square" lIns="0" tIns="0" rIns="0" bIns="0" rtlCol="0" anchor="ctr"/>
           <a:lstStyle/>
           <a:p>
-            <a:pPr indent="0" marL="0">
+            <a:pPr marL="0" indent="0">
               <a:buNone/>
             </a:pPr>
             <a:r>
               <a:rPr lang="en-US" sz="1200" b="1" dirty="0">
                 <a:solidFill>
-                  <a:srgbClr val="FFD166"/>
-                </a:solidFill>
-                <a:latin typeface="Calibri" pitchFamily="34" charset="0"/>
-                <a:ea typeface="Calibri" pitchFamily="34" charset="-122"/>
-                <a:cs typeface="Calibri" pitchFamily="34" charset="-120"/>
-              </a:rPr>
-              <a:t>INVESTIGATE</a:t>
+                  <a:srgbClr val="FF3D57"/>
+                </a:solidFill>
+                <a:latin typeface="Calibri" pitchFamily="34" charset="0"/>
+                <a:ea typeface="Calibri" pitchFamily="34" charset="-122"/>
+                <a:cs typeface="Calibri" pitchFamily="34" charset="-120"/>
+              </a:rPr>
+              <a:t>BLOCK_IP</a:t>
             </a:r>
             <a:endParaRPr lang="en-US" sz="1200" dirty="0"/>
           </a:p>
@@ -4642,13 +4023,13 @@
       </p:sp>
       <p:sp>
         <p:nvSpPr>
-          <p:cNvPr id="21" name="Text 16"/>
-          <p:cNvSpPr/>
-          <p:nvPr/>
-        </p:nvSpPr>
-        <p:spPr>
-          <a:xfrm>
-            <a:off x="1005840" y="3346704"/>
+          <p:cNvPr id="11" name="Text 8"/>
+          <p:cNvSpPr/>
+          <p:nvPr/>
+        </p:nvSpPr>
+        <p:spPr>
+          <a:xfrm>
+            <a:off x="1005840" y="1645920"/>
             <a:ext cx="3200400" cy="274320"/>
           </a:xfrm>
           <a:prstGeom prst="rect">
@@ -4661,7 +4042,7 @@
           <a:bodyPr wrap="square" lIns="0" tIns="0" rIns="0" bIns="0" rtlCol="0" anchor="ctr"/>
           <a:lstStyle/>
           <a:p>
-            <a:pPr indent="0" marL="0">
+            <a:pPr marL="0" indent="0">
               <a:buNone/>
             </a:pPr>
             <a:r>
@@ -4673,7 +4054,7 @@
                 <a:ea typeface="Calibri" pitchFamily="34" charset="-122"/>
                 <a:cs typeface="Calibri" pitchFamily="34" charset="-120"/>
               </a:rPr>
-              <a:t>Posterior 0.40–0.64  ·  MEDIUM</a:t>
+              <a:t>Posterior ≥ 0.85  ·  CRITICAL</a:t>
             </a:r>
             <a:endParaRPr lang="en-US" sz="950" dirty="0"/>
           </a:p>
@@ -4681,13 +4062,13 @@
       </p:sp>
       <p:sp>
         <p:nvSpPr>
-          <p:cNvPr id="22" name="Shape 17"/>
-          <p:cNvSpPr/>
-          <p:nvPr/>
-        </p:nvSpPr>
-        <p:spPr>
-          <a:xfrm>
-            <a:off x="320040" y="3831336"/>
+          <p:cNvPr id="12" name="Shape 9"/>
+          <p:cNvSpPr/>
+          <p:nvPr/>
+        </p:nvSpPr>
+        <p:spPr>
+          <a:xfrm>
+            <a:off x="320040" y="2130552"/>
             <a:ext cx="4114800" cy="713232"/>
           </a:xfrm>
           <a:prstGeom prst="rect">
@@ -4698,7 +4079,7 @@
           </a:solidFill>
           <a:ln w="12700">
             <a:solidFill>
-              <a:srgbClr val="00E676"/>
+              <a:srgbClr val="FF6B35"/>
             </a:solidFill>
             <a:prstDash val="solid"/>
           </a:ln>
@@ -4706,24 +4087,24 @@
       </p:sp>
       <p:sp>
         <p:nvSpPr>
-          <p:cNvPr id="23" name="Shape 18"/>
-          <p:cNvSpPr/>
-          <p:nvPr/>
-        </p:nvSpPr>
-        <p:spPr>
-          <a:xfrm>
-            <a:off x="320040" y="3831336"/>
+          <p:cNvPr id="13" name="Shape 10"/>
+          <p:cNvSpPr/>
+          <p:nvPr/>
+        </p:nvSpPr>
+        <p:spPr>
+          <a:xfrm>
+            <a:off x="320040" y="2130552"/>
             <a:ext cx="64008" cy="713232"/>
           </a:xfrm>
           <a:prstGeom prst="rect">
             <a:avLst/>
           </a:prstGeom>
           <a:solidFill>
-            <a:srgbClr val="00E676"/>
+            <a:srgbClr val="FF6B35"/>
           </a:solidFill>
           <a:ln w="12700">
             <a:solidFill>
-              <a:srgbClr val="00E676"/>
+              <a:srgbClr val="FF6B35"/>
             </a:solidFill>
             <a:prstDash val="solid"/>
           </a:ln>
@@ -4731,7 +4112,7 @@
       </p:sp>
       <p:pic>
         <p:nvPicPr>
-          <p:cNvPr id="24" name="Image 3" descr="preencoded.png">    </p:cNvPr>
+          <p:cNvPr id="14" name="Image 1" descr="preencoded.png"/>
           <p:cNvPicPr>
             <a:picLocks noChangeAspect="1"/>
           </p:cNvPicPr>
@@ -4745,6 +4126,310 @@
         </p:blipFill>
         <p:spPr>
           <a:xfrm>
+            <a:off x="475488" y="2267712"/>
+            <a:ext cx="411480" cy="411480"/>
+          </a:xfrm>
+          <a:prstGeom prst="rect">
+            <a:avLst/>
+          </a:prstGeom>
+        </p:spPr>
+      </p:pic>
+      <p:sp>
+        <p:nvSpPr>
+          <p:cNvPr id="15" name="Text 11"/>
+          <p:cNvSpPr/>
+          <p:nvPr/>
+        </p:nvSpPr>
+        <p:spPr>
+          <a:xfrm>
+            <a:off x="1005840" y="2185416"/>
+            <a:ext cx="2011680" cy="320040"/>
+          </a:xfrm>
+          <a:prstGeom prst="rect">
+            <a:avLst/>
+          </a:prstGeom>
+          <a:noFill/>
+          <a:ln/>
+        </p:spPr>
+        <p:txBody>
+          <a:bodyPr wrap="square" lIns="0" tIns="0" rIns="0" bIns="0" rtlCol="0" anchor="ctr"/>
+          <a:lstStyle/>
+          <a:p>
+            <a:pPr marL="0" indent="0">
+              <a:buNone/>
+            </a:pPr>
+            <a:r>
+              <a:rPr lang="en-US" sz="1200" b="1" dirty="0">
+                <a:solidFill>
+                  <a:srgbClr val="FF6B35"/>
+                </a:solidFill>
+                <a:latin typeface="Calibri" pitchFamily="34" charset="0"/>
+                <a:ea typeface="Calibri" pitchFamily="34" charset="-122"/>
+                <a:cs typeface="Calibri" pitchFamily="34" charset="-120"/>
+              </a:rPr>
+              <a:t>ALERT_ADMIN</a:t>
+            </a:r>
+            <a:endParaRPr lang="en-US" sz="1200" dirty="0"/>
+          </a:p>
+        </p:txBody>
+      </p:sp>
+      <p:sp>
+        <p:nvSpPr>
+          <p:cNvPr id="16" name="Text 12"/>
+          <p:cNvSpPr/>
+          <p:nvPr/>
+        </p:nvSpPr>
+        <p:spPr>
+          <a:xfrm>
+            <a:off x="1005840" y="2496312"/>
+            <a:ext cx="3200400" cy="274320"/>
+          </a:xfrm>
+          <a:prstGeom prst="rect">
+            <a:avLst/>
+          </a:prstGeom>
+          <a:noFill/>
+          <a:ln/>
+        </p:spPr>
+        <p:txBody>
+          <a:bodyPr wrap="square" lIns="0" tIns="0" rIns="0" bIns="0" rtlCol="0" anchor="ctr"/>
+          <a:lstStyle/>
+          <a:p>
+            <a:pPr marL="0" indent="0">
+              <a:buNone/>
+            </a:pPr>
+            <a:r>
+              <a:rPr lang="en-US" sz="950" dirty="0">
+                <a:solidFill>
+                  <a:srgbClr val="6B8CAE"/>
+                </a:solidFill>
+                <a:latin typeface="Calibri" pitchFamily="34" charset="0"/>
+                <a:ea typeface="Calibri" pitchFamily="34" charset="-122"/>
+                <a:cs typeface="Calibri" pitchFamily="34" charset="-120"/>
+              </a:rPr>
+              <a:t>Posterior 0.65–0.84  ·  HIGH</a:t>
+            </a:r>
+            <a:endParaRPr lang="en-US" sz="950" dirty="0"/>
+          </a:p>
+        </p:txBody>
+      </p:sp>
+      <p:sp>
+        <p:nvSpPr>
+          <p:cNvPr id="17" name="Shape 13"/>
+          <p:cNvSpPr/>
+          <p:nvPr/>
+        </p:nvSpPr>
+        <p:spPr>
+          <a:xfrm>
+            <a:off x="320040" y="2980944"/>
+            <a:ext cx="4114800" cy="713232"/>
+          </a:xfrm>
+          <a:prstGeom prst="rect">
+            <a:avLst/>
+          </a:prstGeom>
+          <a:solidFill>
+            <a:srgbClr val="112240"/>
+          </a:solidFill>
+          <a:ln w="12700">
+            <a:solidFill>
+              <a:srgbClr val="FFD166"/>
+            </a:solidFill>
+            <a:prstDash val="solid"/>
+          </a:ln>
+        </p:spPr>
+      </p:sp>
+      <p:sp>
+        <p:nvSpPr>
+          <p:cNvPr id="18" name="Shape 14"/>
+          <p:cNvSpPr/>
+          <p:nvPr/>
+        </p:nvSpPr>
+        <p:spPr>
+          <a:xfrm>
+            <a:off x="320040" y="2980944"/>
+            <a:ext cx="64008" cy="713232"/>
+          </a:xfrm>
+          <a:prstGeom prst="rect">
+            <a:avLst/>
+          </a:prstGeom>
+          <a:solidFill>
+            <a:srgbClr val="FFD166"/>
+          </a:solidFill>
+          <a:ln w="12700">
+            <a:solidFill>
+              <a:srgbClr val="FFD166"/>
+            </a:solidFill>
+            <a:prstDash val="solid"/>
+          </a:ln>
+        </p:spPr>
+      </p:sp>
+      <p:pic>
+        <p:nvPicPr>
+          <p:cNvPr id="19" name="Image 2" descr="preencoded.png"/>
+          <p:cNvPicPr>
+            <a:picLocks noChangeAspect="1"/>
+          </p:cNvPicPr>
+          <p:nvPr/>
+        </p:nvPicPr>
+        <p:blipFill>
+          <a:blip r:embed="rId5"/>
+          <a:stretch>
+            <a:fillRect/>
+          </a:stretch>
+        </p:blipFill>
+        <p:spPr>
+          <a:xfrm>
+            <a:off x="475488" y="3118104"/>
+            <a:ext cx="411480" cy="411480"/>
+          </a:xfrm>
+          <a:prstGeom prst="rect">
+            <a:avLst/>
+          </a:prstGeom>
+        </p:spPr>
+      </p:pic>
+      <p:sp>
+        <p:nvSpPr>
+          <p:cNvPr id="20" name="Text 15"/>
+          <p:cNvSpPr/>
+          <p:nvPr/>
+        </p:nvSpPr>
+        <p:spPr>
+          <a:xfrm>
+            <a:off x="1005840" y="3035808"/>
+            <a:ext cx="2011680" cy="320040"/>
+          </a:xfrm>
+          <a:prstGeom prst="rect">
+            <a:avLst/>
+          </a:prstGeom>
+          <a:noFill/>
+          <a:ln/>
+        </p:spPr>
+        <p:txBody>
+          <a:bodyPr wrap="square" lIns="0" tIns="0" rIns="0" bIns="0" rtlCol="0" anchor="ctr"/>
+          <a:lstStyle/>
+          <a:p>
+            <a:pPr marL="0" indent="0">
+              <a:buNone/>
+            </a:pPr>
+            <a:r>
+              <a:rPr lang="en-US" sz="1200" b="1" dirty="0">
+                <a:solidFill>
+                  <a:srgbClr val="FFD166"/>
+                </a:solidFill>
+                <a:latin typeface="Calibri" pitchFamily="34" charset="0"/>
+                <a:ea typeface="Calibri" pitchFamily="34" charset="-122"/>
+                <a:cs typeface="Calibri" pitchFamily="34" charset="-120"/>
+              </a:rPr>
+              <a:t>INVESTIGATE</a:t>
+            </a:r>
+            <a:endParaRPr lang="en-US" sz="1200" dirty="0"/>
+          </a:p>
+        </p:txBody>
+      </p:sp>
+      <p:sp>
+        <p:nvSpPr>
+          <p:cNvPr id="21" name="Text 16"/>
+          <p:cNvSpPr/>
+          <p:nvPr/>
+        </p:nvSpPr>
+        <p:spPr>
+          <a:xfrm>
+            <a:off x="1005840" y="3346704"/>
+            <a:ext cx="3200400" cy="274320"/>
+          </a:xfrm>
+          <a:prstGeom prst="rect">
+            <a:avLst/>
+          </a:prstGeom>
+          <a:noFill/>
+          <a:ln/>
+        </p:spPr>
+        <p:txBody>
+          <a:bodyPr wrap="square" lIns="0" tIns="0" rIns="0" bIns="0" rtlCol="0" anchor="ctr"/>
+          <a:lstStyle/>
+          <a:p>
+            <a:pPr marL="0" indent="0">
+              <a:buNone/>
+            </a:pPr>
+            <a:r>
+              <a:rPr lang="en-US" sz="950" dirty="0">
+                <a:solidFill>
+                  <a:srgbClr val="6B8CAE"/>
+                </a:solidFill>
+                <a:latin typeface="Calibri" pitchFamily="34" charset="0"/>
+                <a:ea typeface="Calibri" pitchFamily="34" charset="-122"/>
+                <a:cs typeface="Calibri" pitchFamily="34" charset="-120"/>
+              </a:rPr>
+              <a:t>Posterior 0.40–0.64  ·  MEDIUM</a:t>
+            </a:r>
+            <a:endParaRPr lang="en-US" sz="950" dirty="0"/>
+          </a:p>
+        </p:txBody>
+      </p:sp>
+      <p:sp>
+        <p:nvSpPr>
+          <p:cNvPr id="22" name="Shape 17"/>
+          <p:cNvSpPr/>
+          <p:nvPr/>
+        </p:nvSpPr>
+        <p:spPr>
+          <a:xfrm>
+            <a:off x="320040" y="3831336"/>
+            <a:ext cx="4114800" cy="713232"/>
+          </a:xfrm>
+          <a:prstGeom prst="rect">
+            <a:avLst/>
+          </a:prstGeom>
+          <a:solidFill>
+            <a:srgbClr val="112240"/>
+          </a:solidFill>
+          <a:ln w="12700">
+            <a:solidFill>
+              <a:srgbClr val="00E676"/>
+            </a:solidFill>
+            <a:prstDash val="solid"/>
+          </a:ln>
+        </p:spPr>
+      </p:sp>
+      <p:sp>
+        <p:nvSpPr>
+          <p:cNvPr id="23" name="Shape 18"/>
+          <p:cNvSpPr/>
+          <p:nvPr/>
+        </p:nvSpPr>
+        <p:spPr>
+          <a:xfrm>
+            <a:off x="320040" y="3831336"/>
+            <a:ext cx="64008" cy="713232"/>
+          </a:xfrm>
+          <a:prstGeom prst="rect">
+            <a:avLst/>
+          </a:prstGeom>
+          <a:solidFill>
+            <a:srgbClr val="00E676"/>
+          </a:solidFill>
+          <a:ln w="12700">
+            <a:solidFill>
+              <a:srgbClr val="00E676"/>
+            </a:solidFill>
+            <a:prstDash val="solid"/>
+          </a:ln>
+        </p:spPr>
+      </p:sp>
+      <p:pic>
+        <p:nvPicPr>
+          <p:cNvPr id="24" name="Image 3" descr="preencoded.png"/>
+          <p:cNvPicPr>
+            <a:picLocks noChangeAspect="1"/>
+          </p:cNvPicPr>
+          <p:nvPr/>
+        </p:nvPicPr>
+        <p:blipFill>
+          <a:blip r:embed="rId6"/>
+          <a:stretch>
+            <a:fillRect/>
+          </a:stretch>
+        </p:blipFill>
+        <p:spPr>
+          <a:xfrm>
             <a:off x="475488" y="3968496"/>
             <a:ext cx="411480" cy="411480"/>
           </a:xfrm>
@@ -4774,7 +4459,7 @@
           <a:bodyPr wrap="square" lIns="0" tIns="0" rIns="0" bIns="0" rtlCol="0" anchor="ctr"/>
           <a:lstStyle/>
           <a:p>
-            <a:pPr indent="0" marL="0">
+            <a:pPr marL="0" indent="0">
               <a:buNone/>
             </a:pPr>
             <a:r>
@@ -4813,7 +4498,7 @@
           <a:bodyPr wrap="square" lIns="0" tIns="0" rIns="0" bIns="0" rtlCol="0" anchor="ctr"/>
           <a:lstStyle/>
           <a:p>
-            <a:pPr indent="0" marL="0">
+            <a:pPr marL="0" indent="0">
               <a:buNone/>
             </a:pPr>
             <a:r>
@@ -4852,11 +4537,11 @@
           <a:bodyPr wrap="square" lIns="0" tIns="0" rIns="0" bIns="0" rtlCol="0" anchor="ctr"/>
           <a:lstStyle/>
           <a:p>
-            <a:pPr indent="0" marL="0">
-              <a:buNone/>
-            </a:pPr>
-            <a:r>
-              <a:rPr lang="en-US" sz="1100" b="1" spc="200" kern="0" dirty="0">
+            <a:pPr marL="0" indent="0">
+              <a:buNone/>
+            </a:pPr>
+            <a:r>
+              <a:rPr lang="en-US" sz="1100" b="1" kern="0" spc="200" dirty="0">
                 <a:solidFill>
                   <a:srgbClr val="6B8CAE"/>
                 </a:solidFill>
@@ -4941,7 +4626,7 @@
           <a:bodyPr wrap="square" lIns="0" tIns="0" rIns="0" bIns="0" rtlCol="0" anchor="ctr"/>
           <a:lstStyle/>
           <a:p>
-            <a:pPr algn="ctr" indent="0" marL="0">
+            <a:pPr marL="0" indent="0" algn="ctr">
               <a:buNone/>
             </a:pPr>
             <a:r>
@@ -4980,7 +4665,7 @@
           <a:bodyPr wrap="square" lIns="0" tIns="0" rIns="0" bIns="0" rtlCol="0" anchor="ctr"/>
           <a:lstStyle/>
           <a:p>
-            <a:pPr indent="0" marL="0">
+            <a:pPr marL="0" indent="0">
               <a:buNone/>
             </a:pPr>
             <a:r>
@@ -5019,7 +4704,7 @@
           <a:bodyPr wrap="square" lIns="0" tIns="0" rIns="0" bIns="0" rtlCol="0" anchor="ctr"/>
           <a:lstStyle/>
           <a:p>
-            <a:pPr indent="0" marL="0">
+            <a:pPr marL="0" indent="0">
               <a:buNone/>
             </a:pPr>
             <a:r>
@@ -5108,7 +4793,7 @@
           <a:bodyPr wrap="square" lIns="0" tIns="0" rIns="0" bIns="0" rtlCol="0" anchor="ctr"/>
           <a:lstStyle/>
           <a:p>
-            <a:pPr algn="ctr" indent="0" marL="0">
+            <a:pPr marL="0" indent="0" algn="ctr">
               <a:buNone/>
             </a:pPr>
             <a:r>
@@ -5147,7 +4832,7 @@
           <a:bodyPr wrap="square" lIns="0" tIns="0" rIns="0" bIns="0" rtlCol="0" anchor="ctr"/>
           <a:lstStyle/>
           <a:p>
-            <a:pPr indent="0" marL="0">
+            <a:pPr marL="0" indent="0">
               <a:buNone/>
             </a:pPr>
             <a:r>
@@ -5186,7 +4871,7 @@
           <a:bodyPr wrap="square" lIns="0" tIns="0" rIns="0" bIns="0" rtlCol="0" anchor="ctr"/>
           <a:lstStyle/>
           <a:p>
-            <a:pPr indent="0" marL="0">
+            <a:pPr marL="0" indent="0">
               <a:buNone/>
             </a:pPr>
             <a:r>
@@ -5275,7 +4960,7 @@
           <a:bodyPr wrap="square" lIns="0" tIns="0" rIns="0" bIns="0" rtlCol="0" anchor="ctr"/>
           <a:lstStyle/>
           <a:p>
-            <a:pPr algn="ctr" indent="0" marL="0">
+            <a:pPr marL="0" indent="0" algn="ctr">
               <a:buNone/>
             </a:pPr>
             <a:r>
@@ -5314,7 +4999,7 @@
           <a:bodyPr wrap="square" lIns="0" tIns="0" rIns="0" bIns="0" rtlCol="0" anchor="ctr"/>
           <a:lstStyle/>
           <a:p>
-            <a:pPr indent="0" marL="0">
+            <a:pPr marL="0" indent="0">
               <a:buNone/>
             </a:pPr>
             <a:r>
@@ -5353,7 +5038,7 @@
           <a:bodyPr wrap="square" lIns="0" tIns="0" rIns="0" bIns="0" rtlCol="0" anchor="ctr"/>
           <a:lstStyle/>
           <a:p>
-            <a:pPr indent="0" marL="0">
+            <a:pPr marL="0" indent="0">
               <a:buNone/>
             </a:pPr>
             <a:r>
@@ -5442,7 +5127,7 @@
           <a:bodyPr wrap="square" lIns="0" tIns="0" rIns="0" bIns="0" rtlCol="0" anchor="ctr"/>
           <a:lstStyle/>
           <a:p>
-            <a:pPr algn="ctr" indent="0" marL="0">
+            <a:pPr marL="0" indent="0" algn="ctr">
               <a:buNone/>
             </a:pPr>
             <a:r>
@@ -5481,7 +5166,7 @@
           <a:bodyPr wrap="square" lIns="0" tIns="0" rIns="0" bIns="0" rtlCol="0" anchor="ctr"/>
           <a:lstStyle/>
           <a:p>
-            <a:pPr indent="0" marL="0">
+            <a:pPr marL="0" indent="0">
               <a:buNone/>
             </a:pPr>
             <a:r>
@@ -5520,7 +5205,7 @@
           <a:bodyPr wrap="square" lIns="0" tIns="0" rIns="0" bIns="0" rtlCol="0" anchor="ctr"/>
           <a:lstStyle/>
           <a:p>
-            <a:pPr indent="0" marL="0">
+            <a:pPr marL="0" indent="0">
               <a:buNone/>
             </a:pPr>
             <a:r>
@@ -5554,6 +5239,7 @@
         <a:solidFill>
           <a:srgbClr val="0A1628"/>
         </a:solidFill>
+        <a:effectLst/>
       </p:bgPr>
     </p:bg>
     <p:spTree>
@@ -5643,7 +5329,7 @@
           <a:bodyPr wrap="square" lIns="0" tIns="0" rIns="0" bIns="0" rtlCol="0" anchor="ctr"/>
           <a:lstStyle/>
           <a:p>
-            <a:pPr algn="ctr" indent="0" marL="0">
+            <a:pPr marL="0" indent="0" algn="ctr">
               <a:buNone/>
             </a:pPr>
             <a:r>
@@ -5682,7 +5368,7 @@
           <a:bodyPr wrap="square" lIns="0" tIns="0" rIns="0" bIns="0" rtlCol="0" anchor="ctr"/>
           <a:lstStyle/>
           <a:p>
-            <a:pPr indent="0" marL="0">
+            <a:pPr marL="0" indent="0">
               <a:buNone/>
             </a:pPr>
             <a:r>
@@ -5721,7 +5407,7 @@
           <a:bodyPr wrap="square" lIns="0" tIns="0" rIns="0" bIns="0" rtlCol="0" anchor="ctr"/>
           <a:lstStyle/>
           <a:p>
-            <a:pPr indent="0" marL="0">
+            <a:pPr marL="0" indent="0">
               <a:buNone/>
             </a:pPr>
             <a:r>
@@ -5763,7 +5449,7 @@
             <a:prstDash val="solid"/>
           </a:ln>
           <a:effectLst>
-            <a:outerShdw sx="100000" sy="100000" kx="0" ky="0" algn="bl" rotWithShape="0" blurRad="101600" dist="38100" dir="8100000">
+            <a:outerShdw blurRad="101600" dist="38100" dir="8100000" algn="bl" rotWithShape="0">
               <a:srgbClr val="000000">
                 <a:alpha val="25000"/>
               </a:srgbClr>
@@ -5892,7 +5578,7 @@
           <a:bodyPr wrap="square" lIns="0" tIns="0" rIns="0" bIns="0" rtlCol="0" anchor="ctr"/>
           <a:lstStyle/>
           <a:p>
-            <a:pPr algn="ctr" indent="0" marL="0">
+            <a:pPr marL="0" indent="0" algn="ctr">
               <a:buNone/>
             </a:pPr>
             <a:r>
@@ -5931,7 +5617,7 @@
           <a:bodyPr wrap="square" lIns="0" tIns="0" rIns="0" bIns="0" rtlCol="0" anchor="t"/>
           <a:lstStyle/>
           <a:p>
-            <a:pPr indent="0" marL="0">
+            <a:pPr marL="0" indent="0">
               <a:buNone/>
             </a:pPr>
             <a:r>
@@ -5946,9 +5632,6 @@
               <a:t>[run_agent] Simulation mode — 30 synthetic events
 </a:t>
             </a:r>
-            <a:pPr indent="0" marL="0">
-              <a:buNone/>
-            </a:pPr>
             <a:r>
               <a:rPr lang="en-US" sz="950" dirty="0">
                 <a:solidFill>
@@ -5961,9 +5644,6 @@
               <a:t>Event 01 [ATTACK:brute_force]   →  BLOCK_IP        (posterior=0.91)
 </a:t>
             </a:r>
-            <a:pPr indent="0" marL="0">
-              <a:buNone/>
-            </a:pPr>
             <a:r>
               <a:rPr lang="en-US" sz="950" dirty="0">
                 <a:solidFill>
@@ -5976,9 +5656,6 @@
               <a:t>Event 02 [benign]               →  IGNORE          (posterior=0.08)
 </a:t>
             </a:r>
-            <a:pPr indent="0" marL="0">
-              <a:buNone/>
-            </a:pPr>
             <a:r>
               <a:rPr lang="en-US" sz="950" dirty="0">
                 <a:solidFill>
@@ -5991,9 +5668,6 @@
               <a:t>Event 05 [ATTACK:port_scan]     →  ALERT_ADMIN     (posterior=0.72)
 </a:t>
             </a:r>
-            <a:pPr indent="0" marL="0">
-              <a:buNone/>
-            </a:pPr>
             <a:r>
               <a:rPr lang="en-US" sz="950" dirty="0">
                 <a:solidFill>
@@ -6006,9 +5680,6 @@
               <a:t>Event 09 [ATTACK:data_exfil]    →  BLOCK_IP        (posterior=0.88)
 </a:t>
             </a:r>
-            <a:pPr indent="0" marL="0">
-              <a:buNone/>
-            </a:pPr>
             <a:r>
               <a:rPr lang="en-US" sz="950" dirty="0">
                 <a:solidFill>
@@ -6021,9 +5692,6 @@
               <a:t>Event 13 [ATTACK:brute_force]   →  INVESTIGATE     (posterior=0.54)
 </a:t>
             </a:r>
-            <a:pPr indent="0" marL="0">
-              <a:buNone/>
-            </a:pPr>
             <a:r>
               <a:rPr lang="en-US" sz="950" dirty="0">
                 <a:solidFill>
@@ -6036,9 +5704,6 @@
               <a:t>...
 </a:t>
             </a:r>
-            <a:pPr indent="0" marL="0">
-              <a:buNone/>
-            </a:pPr>
             <a:r>
               <a:rPr lang="en-US" sz="950" dirty="0">
                 <a:solidFill>
@@ -6051,9 +5716,6 @@
               <a:t>── Agent Session Summary ──────────────────────────
 </a:t>
             </a:r>
-            <a:pPr indent="0" marL="0">
-              <a:buNone/>
-            </a:pPr>
             <a:r>
               <a:rPr lang="en-US" sz="950" dirty="0">
                 <a:solidFill>
@@ -6066,9 +5728,6 @@
               <a:t>  Total events processed : 30    BLOCK_IP: 5   ALERT_ADMIN: 3   IGNORE: 20   INVESTIGATE: 2
 </a:t>
             </a:r>
-            <a:pPr indent="0" marL="0">
-              <a:buNone/>
-            </a:pPr>
             <a:r>
               <a:rPr lang="en-US" sz="950" dirty="0">
                 <a:solidFill>
@@ -6109,7 +5768,7 @@
             <a:prstDash val="solid"/>
           </a:ln>
           <a:effectLst>
-            <a:outerShdw sx="100000" sy="100000" kx="0" ky="0" algn="bl" rotWithShape="0" blurRad="101600" dist="38100" dir="8100000">
+            <a:outerShdw blurRad="101600" dist="38100" dir="8100000" algn="bl" rotWithShape="0">
               <a:srgbClr val="000000">
                 <a:alpha val="25000"/>
               </a:srgbClr>
@@ -6138,7 +5797,7 @@
           <a:bodyPr wrap="square" lIns="0" tIns="0" rIns="0" bIns="0" rtlCol="0" anchor="ctr"/>
           <a:lstStyle/>
           <a:p>
-            <a:pPr algn="ctr" indent="0" marL="0">
+            <a:pPr marL="0" indent="0" algn="ctr">
               <a:buNone/>
             </a:pPr>
             <a:r>
@@ -6177,7 +5836,7 @@
           <a:bodyPr wrap="square" lIns="0" tIns="0" rIns="0" bIns="0" rtlCol="0" anchor="ctr"/>
           <a:lstStyle/>
           <a:p>
-            <a:pPr algn="ctr" indent="0" marL="0">
+            <a:pPr marL="0" indent="0" algn="ctr">
               <a:buNone/>
             </a:pPr>
             <a:r>
@@ -6219,7 +5878,7 @@
             <a:prstDash val="solid"/>
           </a:ln>
           <a:effectLst>
-            <a:outerShdw sx="100000" sy="100000" kx="0" ky="0" algn="bl" rotWithShape="0" blurRad="101600" dist="38100" dir="8100000">
+            <a:outerShdw blurRad="101600" dist="38100" dir="8100000" algn="bl" rotWithShape="0">
               <a:srgbClr val="000000">
                 <a:alpha val="25000"/>
               </a:srgbClr>
@@ -6248,7 +5907,7 @@
           <a:bodyPr wrap="square" lIns="0" tIns="0" rIns="0" bIns="0" rtlCol="0" anchor="ctr"/>
           <a:lstStyle/>
           <a:p>
-            <a:pPr algn="ctr" indent="0" marL="0">
+            <a:pPr marL="0" indent="0" algn="ctr">
               <a:buNone/>
             </a:pPr>
             <a:r>
@@ -6287,7 +5946,7 @@
           <a:bodyPr wrap="square" lIns="0" tIns="0" rIns="0" bIns="0" rtlCol="0" anchor="ctr"/>
           <a:lstStyle/>
           <a:p>
-            <a:pPr algn="ctr" indent="0" marL="0">
+            <a:pPr marL="0" indent="0" algn="ctr">
               <a:buNone/>
             </a:pPr>
             <a:r>
@@ -6329,7 +5988,7 @@
             <a:prstDash val="solid"/>
           </a:ln>
           <a:effectLst>
-            <a:outerShdw sx="100000" sy="100000" kx="0" ky="0" algn="bl" rotWithShape="0" blurRad="101600" dist="38100" dir="8100000">
+            <a:outerShdw blurRad="101600" dist="38100" dir="8100000" algn="bl" rotWithShape="0">
               <a:srgbClr val="000000">
                 <a:alpha val="25000"/>
               </a:srgbClr>
@@ -6358,7 +6017,7 @@
           <a:bodyPr wrap="square" lIns="0" tIns="0" rIns="0" bIns="0" rtlCol="0" anchor="ctr"/>
           <a:lstStyle/>
           <a:p>
-            <a:pPr algn="ctr" indent="0" marL="0">
+            <a:pPr marL="0" indent="0" algn="ctr">
               <a:buNone/>
             </a:pPr>
             <a:r>
@@ -6397,7 +6056,7 @@
           <a:bodyPr wrap="square" lIns="0" tIns="0" rIns="0" bIns="0" rtlCol="0" anchor="ctr"/>
           <a:lstStyle/>
           <a:p>
-            <a:pPr algn="ctr" indent="0" marL="0">
+            <a:pPr marL="0" indent="0" algn="ctr">
               <a:buNone/>
             </a:pPr>
             <a:r>
@@ -6414,7 +6073,7 @@
             <a:endParaRPr lang="en-US" sz="900" dirty="0"/>
           </a:p>
           <a:p>
-            <a:pPr algn="ctr" indent="0" marL="0">
+            <a:pPr marL="0" indent="0" algn="ctr">
               <a:buNone/>
             </a:pPr>
             <a:r>
@@ -6456,7 +6115,7 @@
             <a:prstDash val="solid"/>
           </a:ln>
           <a:effectLst>
-            <a:outerShdw sx="100000" sy="100000" kx="0" ky="0" algn="bl" rotWithShape="0" blurRad="101600" dist="38100" dir="8100000">
+            <a:outerShdw blurRad="101600" dist="38100" dir="8100000" algn="bl" rotWithShape="0">
               <a:srgbClr val="000000">
                 <a:alpha val="25000"/>
               </a:srgbClr>
@@ -6485,7 +6144,7 @@
           <a:bodyPr wrap="square" lIns="0" tIns="0" rIns="0" bIns="0" rtlCol="0" anchor="ctr"/>
           <a:lstStyle/>
           <a:p>
-            <a:pPr algn="ctr" indent="0" marL="0">
+            <a:pPr marL="0" indent="0" algn="ctr">
               <a:buNone/>
             </a:pPr>
             <a:r>
@@ -6524,7 +6183,7 @@
           <a:bodyPr wrap="square" lIns="0" tIns="0" rIns="0" bIns="0" rtlCol="0" anchor="ctr"/>
           <a:lstStyle/>
           <a:p>
-            <a:pPr algn="ctr" indent="0" marL="0">
+            <a:pPr marL="0" indent="0" algn="ctr">
               <a:buNone/>
             </a:pPr>
             <a:r>
@@ -6541,7 +6200,7 @@
             <a:endParaRPr lang="en-US" sz="900" dirty="0"/>
           </a:p>
           <a:p>
-            <a:pPr algn="ctr" indent="0" marL="0">
+            <a:pPr marL="0" indent="0" algn="ctr">
               <a:buNone/>
             </a:pPr>
             <a:r>
@@ -6575,6 +6234,7 @@
         <a:solidFill>
           <a:srgbClr val="0A1628"/>
         </a:solidFill>
+        <a:effectLst/>
       </p:bgPr>
     </p:bg>
     <p:spTree>
@@ -6664,7 +6324,7 @@
           <a:bodyPr wrap="square" lIns="0" tIns="0" rIns="0" bIns="0" rtlCol="0" anchor="ctr"/>
           <a:lstStyle/>
           <a:p>
-            <a:pPr algn="ctr" indent="0" marL="0">
+            <a:pPr marL="0" indent="0" algn="ctr">
               <a:buNone/>
             </a:pPr>
             <a:r>
@@ -6703,7 +6363,7 @@
           <a:bodyPr wrap="square" lIns="0" tIns="0" rIns="0" bIns="0" rtlCol="0" anchor="ctr"/>
           <a:lstStyle/>
           <a:p>
-            <a:pPr indent="0" marL="0">
+            <a:pPr marL="0" indent="0">
               <a:buNone/>
             </a:pPr>
             <a:r>
@@ -6742,11 +6402,11 @@
           <a:bodyPr wrap="square" lIns="0" tIns="0" rIns="0" bIns="0" rtlCol="0" anchor="ctr"/>
           <a:lstStyle/>
           <a:p>
-            <a:pPr indent="0" marL="0">
-              <a:buNone/>
-            </a:pPr>
-            <a:r>
-              <a:rPr lang="en-US" sz="1100" b="1" spc="200" kern="0" dirty="0">
+            <a:pPr marL="0" indent="0">
+              <a:buNone/>
+            </a:pPr>
+            <a:r>
+              <a:rPr lang="en-US" sz="1100" b="1" kern="0" spc="200" dirty="0">
                 <a:solidFill>
                   <a:srgbClr val="6B8CAE"/>
                 </a:solidFill>
@@ -6806,7 +6466,7 @@
           <a:bodyPr wrap="square" lIns="0" tIns="0" rIns="0" bIns="0" rtlCol="0" anchor="ctr"/>
           <a:lstStyle/>
           <a:p>
-            <a:pPr indent="0" marL="0">
+            <a:pPr marL="0" indent="0">
               <a:buNone/>
             </a:pPr>
             <a:r>
@@ -6845,7 +6505,7 @@
           <a:bodyPr wrap="square" lIns="0" tIns="0" rIns="0" bIns="0" rtlCol="0" anchor="ctr"/>
           <a:lstStyle/>
           <a:p>
-            <a:pPr algn="r" indent="0" marL="0">
+            <a:pPr marL="0" indent="0" algn="r">
               <a:buNone/>
             </a:pPr>
             <a:r>
@@ -6909,7 +6569,7 @@
           <a:bodyPr wrap="square" lIns="0" tIns="0" rIns="0" bIns="0" rtlCol="0" anchor="ctr"/>
           <a:lstStyle/>
           <a:p>
-            <a:pPr indent="0" marL="0">
+            <a:pPr marL="0" indent="0">
               <a:buNone/>
             </a:pPr>
             <a:r>
@@ -6948,7 +6608,7 @@
           <a:bodyPr wrap="square" lIns="0" tIns="0" rIns="0" bIns="0" rtlCol="0" anchor="ctr"/>
           <a:lstStyle/>
           <a:p>
-            <a:pPr algn="r" indent="0" marL="0">
+            <a:pPr marL="0" indent="0" algn="r">
               <a:buNone/>
             </a:pPr>
             <a:r>
@@ -6960,7 +6620,7 @@
                 <a:ea typeface="Calibri" pitchFamily="34" charset="-122"/>
                 <a:cs typeface="Calibri" pitchFamily="34" charset="-120"/>
               </a:rPr>
-              <a:t>0.96</a:t>
+              <a:t>0.99</a:t>
             </a:r>
             <a:endParaRPr lang="en-US" sz="1100" dirty="0"/>
           </a:p>
@@ -7012,7 +6672,7 @@
           <a:bodyPr wrap="square" lIns="0" tIns="0" rIns="0" bIns="0" rtlCol="0" anchor="ctr"/>
           <a:lstStyle/>
           <a:p>
-            <a:pPr indent="0" marL="0">
+            <a:pPr marL="0" indent="0">
               <a:buNone/>
             </a:pPr>
             <a:r>
@@ -7051,7 +6711,7 @@
           <a:bodyPr wrap="square" lIns="0" tIns="0" rIns="0" bIns="0" rtlCol="0" anchor="ctr"/>
           <a:lstStyle/>
           <a:p>
-            <a:pPr algn="r" indent="0" marL="0">
+            <a:pPr marL="0" indent="0" algn="r">
               <a:buNone/>
             </a:pPr>
             <a:r>
@@ -7115,7 +6775,7 @@
           <a:bodyPr wrap="square" lIns="0" tIns="0" rIns="0" bIns="0" rtlCol="0" anchor="ctr"/>
           <a:lstStyle/>
           <a:p>
-            <a:pPr indent="0" marL="0">
+            <a:pPr marL="0" indent="0">
               <a:buNone/>
             </a:pPr>
             <a:r>
@@ -7154,7 +6814,7 @@
           <a:bodyPr wrap="square" lIns="0" tIns="0" rIns="0" bIns="0" rtlCol="0" anchor="ctr"/>
           <a:lstStyle/>
           <a:p>
-            <a:pPr algn="r" indent="0" marL="0">
+            <a:pPr marL="0" indent="0" algn="r">
               <a:buNone/>
             </a:pPr>
             <a:r>
@@ -7218,7 +6878,7 @@
           <a:bodyPr wrap="square" lIns="0" tIns="0" rIns="0" bIns="0" rtlCol="0" anchor="ctr"/>
           <a:lstStyle/>
           <a:p>
-            <a:pPr indent="0" marL="0">
+            <a:pPr marL="0" indent="0">
               <a:buNone/>
             </a:pPr>
             <a:r>
@@ -7257,7 +6917,7 @@
           <a:bodyPr wrap="square" lIns="0" tIns="0" rIns="0" bIns="0" rtlCol="0" anchor="ctr"/>
           <a:lstStyle/>
           <a:p>
-            <a:pPr algn="r" indent="0" marL="0">
+            <a:pPr marL="0" indent="0" algn="r">
               <a:buNone/>
             </a:pPr>
             <a:r>
@@ -7321,7 +6981,7 @@
           <a:bodyPr wrap="square" lIns="0" tIns="0" rIns="0" bIns="0" rtlCol="0" anchor="ctr"/>
           <a:lstStyle/>
           <a:p>
-            <a:pPr indent="0" marL="0">
+            <a:pPr marL="0" indent="0">
               <a:buNone/>
             </a:pPr>
             <a:r>
@@ -7360,7 +7020,7 @@
           <a:bodyPr wrap="square" lIns="0" tIns="0" rIns="0" bIns="0" rtlCol="0" anchor="ctr"/>
           <a:lstStyle/>
           <a:p>
-            <a:pPr algn="r" indent="0" marL="0">
+            <a:pPr marL="0" indent="0" algn="r">
               <a:buNone/>
             </a:pPr>
             <a:r>
@@ -7399,11 +7059,11 @@
           <a:bodyPr wrap="square" lIns="0" tIns="0" rIns="0" bIns="0" rtlCol="0" anchor="ctr"/>
           <a:lstStyle/>
           <a:p>
-            <a:pPr indent="0" marL="0">
-              <a:buNone/>
-            </a:pPr>
-            <a:r>
-              <a:rPr lang="en-US" sz="1100" b="1" spc="200" kern="0" dirty="0">
+            <a:pPr marL="0" indent="0">
+              <a:buNone/>
+            </a:pPr>
+            <a:r>
+              <a:rPr lang="en-US" sz="1100" b="1" kern="0" spc="200" dirty="0">
                 <a:solidFill>
                   <a:srgbClr val="6B8CAE"/>
                 </a:solidFill>
@@ -7444,183 +7104,7 @@
       </p:sp>
       <p:pic>
         <p:nvPicPr>
-          <p:cNvPr id="27" name="Image 0" descr="preencoded.png">    </p:cNvPr>
-          <p:cNvPicPr>
-            <a:picLocks noChangeAspect="1"/>
-          </p:cNvPicPr>
-          <p:nvPr/>
-        </p:nvPicPr>
-        <p:blipFill>
-          <a:blip r:embed="rId1"/>
-          <a:stretch>
-            <a:fillRect/>
-          </a:stretch>
-        </p:blipFill>
-        <p:spPr>
-          <a:xfrm>
-            <a:off x="4818888" y="1408176"/>
-            <a:ext cx="384048" cy="384048"/>
-          </a:xfrm>
-          <a:prstGeom prst="rect">
-            <a:avLst/>
-          </a:prstGeom>
-        </p:spPr>
-      </p:pic>
-      <p:sp>
-        <p:nvSpPr>
-          <p:cNvPr id="28" name="Text 25"/>
-          <p:cNvSpPr/>
-          <p:nvPr/>
-        </p:nvSpPr>
-        <p:spPr>
-          <a:xfrm>
-            <a:off x="5330952" y="1335024"/>
-            <a:ext cx="3401568" cy="594360"/>
-          </a:xfrm>
-          <a:prstGeom prst="rect">
-            <a:avLst/>
-          </a:prstGeom>
-          <a:noFill/>
-          <a:ln/>
-        </p:spPr>
-        <p:txBody>
-          <a:bodyPr wrap="square" lIns="0" tIns="0" rIns="0" bIns="0" rtlCol="0" anchor="ctr"/>
-          <a:lstStyle/>
-          <a:p>
-            <a:pPr indent="0" marL="0">
-              <a:buNone/>
-            </a:pPr>
-            <a:r>
-              <a:rPr lang="en-US" sz="1050" dirty="0">
-                <a:solidFill>
-                  <a:srgbClr val="E8F0F7"/>
-                </a:solidFill>
-                <a:latin typeface="Calibri" pitchFamily="34" charset="0"/>
-                <a:ea typeface="Calibri" pitchFamily="34" charset="-122"/>
-                <a:cs typeface="Calibri" pitchFamily="34" charset="-120"/>
-              </a:rPr>
-              <a:t>LSTM / Transformer for sequential attack pattern detection</a:t>
-            </a:r>
-            <a:endParaRPr lang="en-US" sz="1050" dirty="0"/>
-          </a:p>
-        </p:txBody>
-      </p:sp>
-      <p:sp>
-        <p:nvSpPr>
-          <p:cNvPr id="29" name="Shape 26"/>
-          <p:cNvSpPr/>
-          <p:nvPr/>
-        </p:nvSpPr>
-        <p:spPr>
-          <a:xfrm>
-            <a:off x="4709160" y="2139696"/>
-            <a:ext cx="4114800" cy="768096"/>
-          </a:xfrm>
-          <a:prstGeom prst="rect">
-            <a:avLst/>
-          </a:prstGeom>
-          <a:solidFill>
-            <a:srgbClr val="112240"/>
-          </a:solidFill>
-          <a:ln w="12700">
-            <a:solidFill>
-              <a:srgbClr val="0E3460"/>
-            </a:solidFill>
-            <a:prstDash val="solid"/>
-          </a:ln>
-        </p:spPr>
-      </p:sp>
-      <p:pic>
-        <p:nvPicPr>
-          <p:cNvPr id="30" name="Image 1" descr="preencoded.png">    </p:cNvPr>
-          <p:cNvPicPr>
-            <a:picLocks noChangeAspect="1"/>
-          </p:cNvPicPr>
-          <p:nvPr/>
-        </p:nvPicPr>
-        <p:blipFill>
-          <a:blip r:embed="rId2"/>
-          <a:stretch>
-            <a:fillRect/>
-          </a:stretch>
-        </p:blipFill>
-        <p:spPr>
-          <a:xfrm>
-            <a:off x="4818888" y="2304288"/>
-            <a:ext cx="384048" cy="384048"/>
-          </a:xfrm>
-          <a:prstGeom prst="rect">
-            <a:avLst/>
-          </a:prstGeom>
-        </p:spPr>
-      </p:pic>
-      <p:sp>
-        <p:nvSpPr>
-          <p:cNvPr id="31" name="Text 27"/>
-          <p:cNvSpPr/>
-          <p:nvPr/>
-        </p:nvSpPr>
-        <p:spPr>
-          <a:xfrm>
-            <a:off x="5330952" y="2231136"/>
-            <a:ext cx="3401568" cy="594360"/>
-          </a:xfrm>
-          <a:prstGeom prst="rect">
-            <a:avLst/>
-          </a:prstGeom>
-          <a:noFill/>
-          <a:ln/>
-        </p:spPr>
-        <p:txBody>
-          <a:bodyPr wrap="square" lIns="0" tIns="0" rIns="0" bIns="0" rtlCol="0" anchor="ctr"/>
-          <a:lstStyle/>
-          <a:p>
-            <a:pPr indent="0" marL="0">
-              <a:buNone/>
-            </a:pPr>
-            <a:r>
-              <a:rPr lang="en-US" sz="1050" dirty="0">
-                <a:solidFill>
-                  <a:srgbClr val="E8F0F7"/>
-                </a:solidFill>
-                <a:latin typeface="Calibri" pitchFamily="34" charset="0"/>
-                <a:ea typeface="Calibri" pitchFamily="34" charset="-122"/>
-                <a:cs typeface="Calibri" pitchFamily="34" charset="-120"/>
-              </a:rPr>
-              <a:t>Reinforcement Learning policy trained from analyst feedback</a:t>
-            </a:r>
-            <a:endParaRPr lang="en-US" sz="1050" dirty="0"/>
-          </a:p>
-        </p:txBody>
-      </p:sp>
-      <p:sp>
-        <p:nvSpPr>
-          <p:cNvPr id="32" name="Shape 28"/>
-          <p:cNvSpPr/>
-          <p:nvPr/>
-        </p:nvSpPr>
-        <p:spPr>
-          <a:xfrm>
-            <a:off x="4709160" y="3035808"/>
-            <a:ext cx="4114800" cy="768096"/>
-          </a:xfrm>
-          <a:prstGeom prst="rect">
-            <a:avLst/>
-          </a:prstGeom>
-          <a:solidFill>
-            <a:srgbClr val="112240"/>
-          </a:solidFill>
-          <a:ln w="12700">
-            <a:solidFill>
-              <a:srgbClr val="0E3460"/>
-            </a:solidFill>
-            <a:prstDash val="solid"/>
-          </a:ln>
-        </p:spPr>
-      </p:sp>
-      <p:pic>
-        <p:nvPicPr>
-          <p:cNvPr id="33" name="Image 2" descr="preencoded.png">    </p:cNvPr>
+          <p:cNvPr id="27" name="Image 0" descr="preencoded.png"/>
           <p:cNvPicPr>
             <a:picLocks noChangeAspect="1"/>
           </p:cNvPicPr>
@@ -7634,7 +7118,7 @@
         </p:blipFill>
         <p:spPr>
           <a:xfrm>
-            <a:off x="4818888" y="3200400"/>
+            <a:off x="4818888" y="1408176"/>
             <a:ext cx="384048" cy="384048"/>
           </a:xfrm>
           <a:prstGeom prst="rect">
@@ -7644,13 +7128,13 @@
       </p:pic>
       <p:sp>
         <p:nvSpPr>
-          <p:cNvPr id="34" name="Text 29"/>
-          <p:cNvSpPr/>
-          <p:nvPr/>
-        </p:nvSpPr>
-        <p:spPr>
-          <a:xfrm>
-            <a:off x="5330952" y="3127248"/>
+          <p:cNvPr id="28" name="Text 25"/>
+          <p:cNvSpPr/>
+          <p:nvPr/>
+        </p:nvSpPr>
+        <p:spPr>
+          <a:xfrm>
+            <a:off x="5330952" y="1335024"/>
             <a:ext cx="3401568" cy="594360"/>
           </a:xfrm>
           <a:prstGeom prst="rect">
@@ -7663,7 +7147,7 @@
           <a:bodyPr wrap="square" lIns="0" tIns="0" rIns="0" bIns="0" rtlCol="0" anchor="ctr"/>
           <a:lstStyle/>
           <a:p>
-            <a:pPr indent="0" marL="0">
+            <a:pPr marL="0" indent="0">
               <a:buNone/>
             </a:pPr>
             <a:r>
@@ -7675,7 +7159,7 @@
                 <a:ea typeface="Calibri" pitchFamily="34" charset="-122"/>
                 <a:cs typeface="Calibri" pitchFamily="34" charset="-120"/>
               </a:rPr>
-              <a:t>LLM integration for natural-language threat explanations</a:t>
+              <a:t>LSTM / Transformer for sequential attack pattern detection</a:t>
             </a:r>
             <a:endParaRPr lang="en-US" sz="1050" dirty="0"/>
           </a:p>
@@ -7683,13 +7167,13 @@
       </p:sp>
       <p:sp>
         <p:nvSpPr>
-          <p:cNvPr id="35" name="Shape 30"/>
-          <p:cNvSpPr/>
-          <p:nvPr/>
-        </p:nvSpPr>
-        <p:spPr>
-          <a:xfrm>
-            <a:off x="4709160" y="3931920"/>
+          <p:cNvPr id="29" name="Shape 26"/>
+          <p:cNvSpPr/>
+          <p:nvPr/>
+        </p:nvSpPr>
+        <p:spPr>
+          <a:xfrm>
+            <a:off x="4709160" y="2139696"/>
             <a:ext cx="4114800" cy="768096"/>
           </a:xfrm>
           <a:prstGeom prst="rect">
@@ -7708,7 +7192,7 @@
       </p:sp>
       <p:pic>
         <p:nvPicPr>
-          <p:cNvPr id="36" name="Image 3" descr="preencoded.png">    </p:cNvPr>
+          <p:cNvPr id="30" name="Image 1" descr="preencoded.png"/>
           <p:cNvPicPr>
             <a:picLocks noChangeAspect="1"/>
           </p:cNvPicPr>
@@ -7722,6 +7206,182 @@
         </p:blipFill>
         <p:spPr>
           <a:xfrm>
+            <a:off x="4818888" y="2304288"/>
+            <a:ext cx="384048" cy="384048"/>
+          </a:xfrm>
+          <a:prstGeom prst="rect">
+            <a:avLst/>
+          </a:prstGeom>
+        </p:spPr>
+      </p:pic>
+      <p:sp>
+        <p:nvSpPr>
+          <p:cNvPr id="31" name="Text 27"/>
+          <p:cNvSpPr/>
+          <p:nvPr/>
+        </p:nvSpPr>
+        <p:spPr>
+          <a:xfrm>
+            <a:off x="5330952" y="2231136"/>
+            <a:ext cx="3401568" cy="594360"/>
+          </a:xfrm>
+          <a:prstGeom prst="rect">
+            <a:avLst/>
+          </a:prstGeom>
+          <a:noFill/>
+          <a:ln/>
+        </p:spPr>
+        <p:txBody>
+          <a:bodyPr wrap="square" lIns="0" tIns="0" rIns="0" bIns="0" rtlCol="0" anchor="ctr"/>
+          <a:lstStyle/>
+          <a:p>
+            <a:pPr marL="0" indent="0">
+              <a:buNone/>
+            </a:pPr>
+            <a:r>
+              <a:rPr lang="en-US" sz="1050" dirty="0">
+                <a:solidFill>
+                  <a:srgbClr val="E8F0F7"/>
+                </a:solidFill>
+                <a:latin typeface="Calibri" pitchFamily="34" charset="0"/>
+                <a:ea typeface="Calibri" pitchFamily="34" charset="-122"/>
+                <a:cs typeface="Calibri" pitchFamily="34" charset="-120"/>
+              </a:rPr>
+              <a:t>Reinforcement Learning policy trained from analyst feedback</a:t>
+            </a:r>
+            <a:endParaRPr lang="en-US" sz="1050" dirty="0"/>
+          </a:p>
+        </p:txBody>
+      </p:sp>
+      <p:sp>
+        <p:nvSpPr>
+          <p:cNvPr id="32" name="Shape 28"/>
+          <p:cNvSpPr/>
+          <p:nvPr/>
+        </p:nvSpPr>
+        <p:spPr>
+          <a:xfrm>
+            <a:off x="4709160" y="3035808"/>
+            <a:ext cx="4114800" cy="768096"/>
+          </a:xfrm>
+          <a:prstGeom prst="rect">
+            <a:avLst/>
+          </a:prstGeom>
+          <a:solidFill>
+            <a:srgbClr val="112240"/>
+          </a:solidFill>
+          <a:ln w="12700">
+            <a:solidFill>
+              <a:srgbClr val="0E3460"/>
+            </a:solidFill>
+            <a:prstDash val="solid"/>
+          </a:ln>
+        </p:spPr>
+      </p:sp>
+      <p:pic>
+        <p:nvPicPr>
+          <p:cNvPr id="33" name="Image 2" descr="preencoded.png"/>
+          <p:cNvPicPr>
+            <a:picLocks noChangeAspect="1"/>
+          </p:cNvPicPr>
+          <p:nvPr/>
+        </p:nvPicPr>
+        <p:blipFill>
+          <a:blip r:embed="rId5"/>
+          <a:stretch>
+            <a:fillRect/>
+          </a:stretch>
+        </p:blipFill>
+        <p:spPr>
+          <a:xfrm>
+            <a:off x="4818888" y="3200400"/>
+            <a:ext cx="384048" cy="384048"/>
+          </a:xfrm>
+          <a:prstGeom prst="rect">
+            <a:avLst/>
+          </a:prstGeom>
+        </p:spPr>
+      </p:pic>
+      <p:sp>
+        <p:nvSpPr>
+          <p:cNvPr id="34" name="Text 29"/>
+          <p:cNvSpPr/>
+          <p:nvPr/>
+        </p:nvSpPr>
+        <p:spPr>
+          <a:xfrm>
+            <a:off x="5330952" y="3127248"/>
+            <a:ext cx="3401568" cy="594360"/>
+          </a:xfrm>
+          <a:prstGeom prst="rect">
+            <a:avLst/>
+          </a:prstGeom>
+          <a:noFill/>
+          <a:ln/>
+        </p:spPr>
+        <p:txBody>
+          <a:bodyPr wrap="square" lIns="0" tIns="0" rIns="0" bIns="0" rtlCol="0" anchor="ctr"/>
+          <a:lstStyle/>
+          <a:p>
+            <a:pPr marL="0" indent="0">
+              <a:buNone/>
+            </a:pPr>
+            <a:r>
+              <a:rPr lang="en-US" sz="1050" dirty="0">
+                <a:solidFill>
+                  <a:srgbClr val="E8F0F7"/>
+                </a:solidFill>
+                <a:latin typeface="Calibri" pitchFamily="34" charset="0"/>
+                <a:ea typeface="Calibri" pitchFamily="34" charset="-122"/>
+                <a:cs typeface="Calibri" pitchFamily="34" charset="-120"/>
+              </a:rPr>
+              <a:t>LLM integration for natural-language threat explanations</a:t>
+            </a:r>
+            <a:endParaRPr lang="en-US" sz="1050" dirty="0"/>
+          </a:p>
+        </p:txBody>
+      </p:sp>
+      <p:sp>
+        <p:nvSpPr>
+          <p:cNvPr id="35" name="Shape 30"/>
+          <p:cNvSpPr/>
+          <p:nvPr/>
+        </p:nvSpPr>
+        <p:spPr>
+          <a:xfrm>
+            <a:off x="4709160" y="3931920"/>
+            <a:ext cx="4114800" cy="768096"/>
+          </a:xfrm>
+          <a:prstGeom prst="rect">
+            <a:avLst/>
+          </a:prstGeom>
+          <a:solidFill>
+            <a:srgbClr val="112240"/>
+          </a:solidFill>
+          <a:ln w="12700">
+            <a:solidFill>
+              <a:srgbClr val="0E3460"/>
+            </a:solidFill>
+            <a:prstDash val="solid"/>
+          </a:ln>
+        </p:spPr>
+      </p:sp>
+      <p:pic>
+        <p:nvPicPr>
+          <p:cNvPr id="36" name="Image 3" descr="preencoded.png"/>
+          <p:cNvPicPr>
+            <a:picLocks noChangeAspect="1"/>
+          </p:cNvPicPr>
+          <p:nvPr/>
+        </p:nvPicPr>
+        <p:blipFill>
+          <a:blip r:embed="rId6"/>
+          <a:stretch>
+            <a:fillRect/>
+          </a:stretch>
+        </p:blipFill>
+        <p:spPr>
+          <a:xfrm>
             <a:off x="4818888" y="4096512"/>
             <a:ext cx="384048" cy="384048"/>
           </a:xfrm>
@@ -7751,7 +7411,7 @@
           <a:bodyPr wrap="square" lIns="0" tIns="0" rIns="0" bIns="0" rtlCol="0" anchor="ctr"/>
           <a:lstStyle/>
           <a:p>
-            <a:pPr indent="0" marL="0">
+            <a:pPr marL="0" indent="0">
               <a:buNone/>
             </a:pPr>
             <a:r>
@@ -7815,7 +7475,7 @@
           <a:bodyPr wrap="square" lIns="0" tIns="0" rIns="0" bIns="0" rtlCol="0" anchor="ctr"/>
           <a:lstStyle/>
           <a:p>
-            <a:pPr algn="ctr" indent="0" marL="0">
+            <a:pPr marL="0" indent="0" algn="ctr">
               <a:buNone/>
             </a:pPr>
             <a:r>
@@ -8134,4 +7794,299 @@
     </a:ext>
   </a:extLst>
 </a:theme>
+</file>
+
+<file path=ppt/theme/theme2.xml><?xml version="1.0" encoding="utf-8"?>
+<a:theme xmlns:a="http://schemas.openxmlformats.org/drawingml/2006/main" name="Office Theme">
+  <a:themeElements>
+    <a:clrScheme name="Office">
+      <a:dk1>
+        <a:sysClr val="windowText" lastClr="000000"/>
+      </a:dk1>
+      <a:lt1>
+        <a:sysClr val="window" lastClr="FFFFFF"/>
+      </a:lt1>
+      <a:dk2>
+        <a:srgbClr val="44546A"/>
+      </a:dk2>
+      <a:lt2>
+        <a:srgbClr val="E7E6E6"/>
+      </a:lt2>
+      <a:accent1>
+        <a:srgbClr val="4472C4"/>
+      </a:accent1>
+      <a:accent2>
+        <a:srgbClr val="ED7D31"/>
+      </a:accent2>
+      <a:accent3>
+        <a:srgbClr val="A5A5A5"/>
+      </a:accent3>
+      <a:accent4>
+        <a:srgbClr val="FFC000"/>
+      </a:accent4>
+      <a:accent5>
+        <a:srgbClr val="5B9BD5"/>
+      </a:accent5>
+      <a:accent6>
+        <a:srgbClr val="70AD47"/>
+      </a:accent6>
+      <a:hlink>
+        <a:srgbClr val="0563C1"/>
+      </a:hlink>
+      <a:folHlink>
+        <a:srgbClr val="954F72"/>
+      </a:folHlink>
+    </a:clrScheme>
+    <a:fontScheme name="Office">
+      <a:majorFont>
+        <a:latin typeface="Calibri Light" panose="020F0302020204030204"/>
+        <a:ea typeface=""/>
+        <a:cs typeface=""/>
+        <a:font script="Jpan" typeface="游ゴシック Light"/>
+        <a:font script="Hang" typeface="맑은 고딕"/>
+        <a:font script="Hans" typeface="等线 Light"/>
+        <a:font script="Hant" typeface="新細明體"/>
+        <a:font script="Arab" typeface="Times New Roman"/>
+        <a:font script="Hebr" typeface="Times New Roman"/>
+        <a:font script="Thai" typeface="Angsana New"/>
+        <a:font script="Ethi" typeface="Nyala"/>
+        <a:font script="Beng" typeface="Vrinda"/>
+        <a:font script="Gujr" typeface="Shruti"/>
+        <a:font script="Khmr" typeface="MoolBoran"/>
+        <a:font script="Knda" typeface="Tunga"/>
+        <a:font script="Guru" typeface="Raavi"/>
+        <a:font script="Cans" typeface="Euphemia"/>
+        <a:font script="Cher" typeface="Plantagenet Cherokee"/>
+        <a:font script="Yiii" typeface="Microsoft Yi Baiti"/>
+        <a:font script="Tibt" typeface="Microsoft Himalaya"/>
+        <a:font script="Thaa" typeface="MV Boli"/>
+        <a:font script="Deva" typeface="Mangal"/>
+        <a:font script="Telu" typeface="Gautami"/>
+        <a:font script="Taml" typeface="Latha"/>
+        <a:font script="Syrc" typeface="Estrangelo Edessa"/>
+        <a:font script="Orya" typeface="Kalinga"/>
+        <a:font script="Mlym" typeface="Kartika"/>
+        <a:font script="Laoo" typeface="DokChampa"/>
+        <a:font script="Sinh" typeface="Iskoola Pota"/>
+        <a:font script="Mong" typeface="Mongolian Baiti"/>
+        <a:font script="Viet" typeface="Times New Roman"/>
+        <a:font script="Uigh" typeface="Microsoft Uighur"/>
+        <a:font script="Geor" typeface="Sylfaen"/>
+        <a:font script="Armn" typeface="Arial"/>
+        <a:font script="Bugi" typeface="Leelawadee UI"/>
+        <a:font script="Bopo" typeface="Microsoft JhengHei"/>
+        <a:font script="Java" typeface="Javanese Text"/>
+        <a:font script="Lisu" typeface="Segoe UI"/>
+        <a:font script="Mymr" typeface="Myanmar Text"/>
+        <a:font script="Nkoo" typeface="Ebrima"/>
+        <a:font script="Olck" typeface="Nirmala UI"/>
+        <a:font script="Osma" typeface="Ebrima"/>
+        <a:font script="Phag" typeface="Phagspa"/>
+        <a:font script="Syrn" typeface="Estrangelo Edessa"/>
+        <a:font script="Syrj" typeface="Estrangelo Edessa"/>
+        <a:font script="Syre" typeface="Estrangelo Edessa"/>
+        <a:font script="Sora" typeface="Nirmala UI"/>
+        <a:font script="Tale" typeface="Microsoft Tai Le"/>
+        <a:font script="Talu" typeface="Microsoft New Tai Lue"/>
+        <a:font script="Tfng" typeface="Ebrima"/>
+      </a:majorFont>
+      <a:minorFont>
+        <a:latin typeface="Calibri" panose="020F0502020204030204"/>
+        <a:ea typeface=""/>
+        <a:cs typeface=""/>
+        <a:font script="Jpan" typeface="游ゴシック"/>
+        <a:font script="Hang" typeface="맑은 고딕"/>
+        <a:font script="Hans" typeface="等线"/>
+        <a:font script="Hant" typeface="新細明體"/>
+        <a:font script="Arab" typeface="Arial"/>
+        <a:font script="Hebr" typeface="Arial"/>
+        <a:font script="Thai" typeface="Cordia New"/>
+        <a:font script="Ethi" typeface="Nyala"/>
+        <a:font script="Beng" typeface="Vrinda"/>
+        <a:font script="Gujr" typeface="Shruti"/>
+        <a:font script="Khmr" typeface="DaunPenh"/>
+        <a:font script="Knda" typeface="Tunga"/>
+        <a:font script="Guru" typeface="Raavi"/>
+        <a:font script="Cans" typeface="Euphemia"/>
+        <a:font script="Cher" typeface="Plantagenet Cherokee"/>
+        <a:font script="Yiii" typeface="Microsoft Yi Baiti"/>
+        <a:font script="Tibt" typeface="Microsoft Himalaya"/>
+        <a:font script="Thaa" typeface="MV Boli"/>
+        <a:font script="Deva" typeface="Mangal"/>
+        <a:font script="Telu" typeface="Gautami"/>
+        <a:font script="Taml" typeface="Latha"/>
+        <a:font script="Syrc" typeface="Estrangelo Edessa"/>
+        <a:font script="Orya" typeface="Kalinga"/>
+        <a:font script="Mlym" typeface="Kartika"/>
+        <a:font script="Laoo" typeface="DokChampa"/>
+        <a:font script="Sinh" typeface="Iskoola Pota"/>
+        <a:font script="Mong" typeface="Mongolian Baiti"/>
+        <a:font script="Viet" typeface="Arial"/>
+        <a:font script="Uigh" typeface="Microsoft Uighur"/>
+        <a:font script="Geor" typeface="Sylfaen"/>
+        <a:font script="Armn" typeface="Arial"/>
+        <a:font script="Bugi" typeface="Leelawadee UI"/>
+        <a:font script="Bopo" typeface="Microsoft JhengHei"/>
+        <a:font script="Java" typeface="Javanese Text"/>
+        <a:font script="Lisu" typeface="Segoe UI"/>
+        <a:font script="Mymr" typeface="Myanmar Text"/>
+        <a:font script="Nkoo" typeface="Ebrima"/>
+        <a:font script="Olck" typeface="Nirmala UI"/>
+        <a:font script="Osma" typeface="Ebrima"/>
+        <a:font script="Phag" typeface="Phagspa"/>
+        <a:font script="Syrn" typeface="Estrangelo Edessa"/>
+        <a:font script="Syrj" typeface="Estrangelo Edessa"/>
+        <a:font script="Syre" typeface="Estrangelo Edessa"/>
+        <a:font script="Sora" typeface="Nirmala UI"/>
+        <a:font script="Tale" typeface="Microsoft Tai Le"/>
+        <a:font script="Talu" typeface="Microsoft New Tai Lue"/>
+        <a:font script="Tfng" typeface="Ebrima"/>
+      </a:minorFont>
+    </a:fontScheme>
+    <a:fmtScheme name="Office">
+      <a:fillStyleLst>
+        <a:solidFill>
+          <a:schemeClr val="phClr"/>
+        </a:solidFill>
+        <a:gradFill rotWithShape="1">
+          <a:gsLst>
+            <a:gs pos="0">
+              <a:schemeClr val="phClr">
+                <a:lumMod val="110000"/>
+                <a:satMod val="105000"/>
+                <a:tint val="67000"/>
+              </a:schemeClr>
+            </a:gs>
+            <a:gs pos="50000">
+              <a:schemeClr val="phClr">
+                <a:lumMod val="105000"/>
+                <a:satMod val="103000"/>
+                <a:tint val="73000"/>
+              </a:schemeClr>
+            </a:gs>
+            <a:gs pos="100000">
+              <a:schemeClr val="phClr">
+                <a:lumMod val="105000"/>
+                <a:satMod val="109000"/>
+                <a:tint val="81000"/>
+              </a:schemeClr>
+            </a:gs>
+          </a:gsLst>
+          <a:lin ang="5400000" scaled="0"/>
+        </a:gradFill>
+        <a:gradFill rotWithShape="1">
+          <a:gsLst>
+            <a:gs pos="0">
+              <a:schemeClr val="phClr">
+                <a:satMod val="103000"/>
+                <a:lumMod val="102000"/>
+                <a:tint val="94000"/>
+              </a:schemeClr>
+            </a:gs>
+            <a:gs pos="50000">
+              <a:schemeClr val="phClr">
+                <a:satMod val="110000"/>
+                <a:lumMod val="100000"/>
+                <a:shade val="100000"/>
+              </a:schemeClr>
+            </a:gs>
+            <a:gs pos="100000">
+              <a:schemeClr val="phClr">
+                <a:lumMod val="99000"/>
+                <a:satMod val="120000"/>
+                <a:shade val="78000"/>
+              </a:schemeClr>
+            </a:gs>
+          </a:gsLst>
+          <a:lin ang="5400000" scaled="0"/>
+        </a:gradFill>
+      </a:fillStyleLst>
+      <a:lnStyleLst>
+        <a:ln w="6350" cap="flat" cmpd="sng" algn="ctr">
+          <a:solidFill>
+            <a:schemeClr val="phClr"/>
+          </a:solidFill>
+          <a:prstDash val="solid"/>
+          <a:miter lim="800000"/>
+        </a:ln>
+        <a:ln w="12700" cap="flat" cmpd="sng" algn="ctr">
+          <a:solidFill>
+            <a:schemeClr val="phClr"/>
+          </a:solidFill>
+          <a:prstDash val="solid"/>
+          <a:miter lim="800000"/>
+        </a:ln>
+        <a:ln w="19050" cap="flat" cmpd="sng" algn="ctr">
+          <a:solidFill>
+            <a:schemeClr val="phClr"/>
+          </a:solidFill>
+          <a:prstDash val="solid"/>
+          <a:miter lim="800000"/>
+        </a:ln>
+      </a:lnStyleLst>
+      <a:effectStyleLst>
+        <a:effectStyle>
+          <a:effectLst/>
+        </a:effectStyle>
+        <a:effectStyle>
+          <a:effectLst/>
+        </a:effectStyle>
+        <a:effectStyle>
+          <a:effectLst>
+            <a:outerShdw blurRad="57150" dist="19050" dir="5400000" algn="ctr" rotWithShape="0">
+              <a:srgbClr val="000000">
+                <a:alpha val="63000"/>
+              </a:srgbClr>
+            </a:outerShdw>
+          </a:effectLst>
+        </a:effectStyle>
+      </a:effectStyleLst>
+      <a:bgFillStyleLst>
+        <a:solidFill>
+          <a:schemeClr val="phClr"/>
+        </a:solidFill>
+        <a:solidFill>
+          <a:schemeClr val="phClr">
+            <a:tint val="95000"/>
+            <a:satMod val="170000"/>
+          </a:schemeClr>
+        </a:solidFill>
+        <a:gradFill rotWithShape="1">
+          <a:gsLst>
+            <a:gs pos="0">
+              <a:schemeClr val="phClr">
+                <a:tint val="93000"/>
+                <a:satMod val="150000"/>
+                <a:shade val="98000"/>
+                <a:lumMod val="102000"/>
+              </a:schemeClr>
+            </a:gs>
+            <a:gs pos="50000">
+              <a:schemeClr val="phClr">
+                <a:tint val="98000"/>
+                <a:satMod val="130000"/>
+                <a:shade val="90000"/>
+                <a:lumMod val="103000"/>
+              </a:schemeClr>
+            </a:gs>
+            <a:gs pos="100000">
+              <a:schemeClr val="phClr">
+                <a:shade val="63000"/>
+                <a:satMod val="120000"/>
+              </a:schemeClr>
+            </a:gs>
+          </a:gsLst>
+          <a:lin ang="5400000" scaled="0"/>
+        </a:gradFill>
+      </a:bgFillStyleLst>
+    </a:fmtScheme>
+  </a:themeElements>
+  <a:objectDefaults/>
+  <a:extraClrSchemeLst/>
+  <a:extLst>
+    <a:ext uri="{05A4C25C-085E-4340-85A3-A5531E510DB2}">
+      <thm15:themeFamily xmlns:thm15="http://schemas.microsoft.com/office/thememl/2012/main" name="Office Theme" id="{62F939B6-93AF-4DB8-9C6B-D6C7DFDC589F}" vid="{4A3C46E8-61CC-4603-A589-7422A47A8E4A}"/>
+    </a:ext>
+  </a:extLst>
+</a:theme>
 </file>